--- a/slides/3-8_vasopressors/3-8_vasopressors.pptx
+++ b/slides/3-8_vasopressors/3-8_vasopressors.pptx
@@ -5393,6 +5393,17 @@
                         <a:buNone/>
                       </a:pPr>
                       <a:r>
+                        <a:rPr lang="ja-JP" altLang="en-US" sz="2200" b="1" dirty="0">
+                          <a:solidFill>
+                            <a:srgbClr val="00A8AA"/>
+                          </a:solidFill>
+                          <a:latin typeface="メイリオ" pitchFamily="34" charset="0"/>
+                          <a:ea typeface="メイリオ" pitchFamily="34" charset="-122"/>
+                          <a:cs typeface="メイリオ" pitchFamily="34" charset="-120"/>
+                        </a:rPr>
+                        <a:t>◎</a:t>
+                      </a:r>
+                      <a:r>
                         <a:rPr lang="ja-JP" altLang="en-US" sz="2200" dirty="0">
                           <a:solidFill>
                             <a:srgbClr val="262626"/>
@@ -5401,7 +5412,7 @@
                           <a:ea typeface="メイリオ" pitchFamily="34" charset="-122"/>
                           <a:cs typeface="メイリオ" pitchFamily="34" charset="-120"/>
                         </a:rPr>
-                        <a:t>◎（β2 も）</a:t>
+                        <a:t>（β2 も）</a:t>
                       </a:r>
                       <a:endParaRPr lang="en-US" sz="2200" dirty="0">
                         <a:latin typeface="メイリオ" charset="0"/>
@@ -12002,7 +12013,7 @@
         <p:spPr>
           <a:xfrm>
             <a:off x="502920" y="1828800"/>
-            <a:ext cx="11155680" cy="3831336"/>
+            <a:ext cx="11155680" cy="4087368"/>
           </a:xfrm>
           <a:prstGeom prst="rect">
             <a:avLst/>
@@ -12016,7 +12027,7 @@
           <a:p>
             <a:pPr algn="l" marL="355600" indent="-355600">
               <a:spcAft>
-                <a:spcPts val="2800"/>
+                <a:spcPts val="3200"/>
               </a:spcAft>
               <a:buSzPct val="100000"/>
               <a:buChar char="•"/>
@@ -12048,7 +12059,7 @@
           <a:p>
             <a:pPr algn="l" marL="355600" indent="-355600">
               <a:spcAft>
-                <a:spcPts val="2800"/>
+                <a:spcPts val="3200"/>
               </a:spcAft>
               <a:buSzPct val="100000"/>
               <a:buChar char="•"/>
@@ -12080,7 +12091,7 @@
           <a:p>
             <a:pPr algn="l" marL="355600" indent="-355600">
               <a:spcAft>
-                <a:spcPts val="2800"/>
+                <a:spcPts val="3200"/>
               </a:spcAft>
               <a:buSzPct val="100000"/>
               <a:buChar char="•"/>
@@ -12112,7 +12123,7 @@
           <a:p>
             <a:pPr algn="l" marL="355600" indent="-355600">
               <a:spcAft>
-                <a:spcPts val="2800"/>
+                <a:spcPts val="3200"/>
               </a:spcAft>
               <a:buSzPct val="100000"/>
               <a:buChar char="•"/>
@@ -12133,7 +12144,7 @@
           <a:p>
             <a:pPr algn="l" marL="355600" indent="-355600">
               <a:spcAft>
-                <a:spcPts val="2800"/>
+                <a:spcPts val="3200"/>
               </a:spcAft>
               <a:buSzPct val="100000"/>
               <a:buChar char="•"/>

--- a/slides/3-8_vasopressors/3-8_vasopressors.pptx
+++ b/slides/3-8_vasopressors/3-8_vasopressors.pptx
@@ -2281,7 +2281,7 @@
           </a:xfrm>
           <a:prstGeom prst="roundRect">
             <a:avLst>
-              <a:gd name="adj" fmla="val 15625"/>
+              <a:gd name="adj" fmla="val 7813"/>
             </a:avLst>
           </a:prstGeom>
           <a:solidFill>
@@ -2290,14 +2290,14 @@
           <a:ln/>
         </p:spPr>
         <p:txBody>
-          <a:bodyPr wrap="square" lIns="0" tIns="0" rIns="0" bIns="0" rtlCol="0" anchor="ctr"/>
+          <a:bodyPr wrap="none" lIns="0" tIns="0" rIns="0" bIns="0" rtlCol="0" anchor="ctr"/>
           <a:lstStyle/>
           <a:p>
             <a:pPr algn="ctr" indent="0" marL="0">
               <a:buNone/>
             </a:pPr>
             <a:r>
-              <a:rPr lang="ja-JP" altLang="en-US" sz="1100" dirty="0">
+              <a:rPr lang="ja-JP" altLang="en-US" sz="1050" dirty="0">
                 <a:solidFill>
                   <a:srgbClr val="404040"/>
                 </a:solidFill>
@@ -2307,14 +2307,14 @@
               </a:rPr>
               <a:t>4つの</a:t>
             </a:r>
-            <a:endParaRPr lang="ja-JP" sz="1100" dirty="0"/>
+            <a:endParaRPr lang="ja-JP" sz="1050" dirty="0"/>
           </a:p>
           <a:p>
             <a:pPr algn="ctr" indent="0" marL="0">
               <a:buNone/>
             </a:pPr>
             <a:r>
-              <a:rPr lang="ja-JP" altLang="en-US" sz="1100" dirty="0">
+              <a:rPr lang="ja-JP" altLang="en-US" sz="1050" dirty="0">
                 <a:solidFill>
                   <a:srgbClr val="404040"/>
                 </a:solidFill>
@@ -2324,7 +2324,7 @@
               </a:rPr>
               <a:t>要素</a:t>
             </a:r>
-            <a:endParaRPr lang="ja-JP" sz="1100" dirty="0"/>
+            <a:endParaRPr lang="ja-JP" sz="1050" dirty="0"/>
           </a:p>
         </p:txBody>
       </p:sp>
@@ -2341,7 +2341,7 @@
           </a:xfrm>
           <a:prstGeom prst="roundRect">
             <a:avLst>
-              <a:gd name="adj" fmla="val 15625"/>
+              <a:gd name="adj" fmla="val 7813"/>
             </a:avLst>
           </a:prstGeom>
           <a:solidFill>
@@ -2350,14 +2350,14 @@
           <a:ln/>
         </p:spPr>
         <p:txBody>
-          <a:bodyPr wrap="square" lIns="0" tIns="0" rIns="0" bIns="0" rtlCol="0" anchor="ctr"/>
+          <a:bodyPr wrap="none" lIns="0" tIns="0" rIns="0" bIns="0" rtlCol="0" anchor="ctr"/>
           <a:lstStyle/>
           <a:p>
             <a:pPr algn="ctr" indent="0" marL="0">
               <a:buNone/>
             </a:pPr>
             <a:r>
-              <a:rPr lang="ja-JP" altLang="en-US" sz="1100" dirty="0">
+              <a:rPr lang="ja-JP" altLang="en-US" sz="1050" dirty="0">
                 <a:solidFill>
                   <a:srgbClr val="404040"/>
                 </a:solidFill>
@@ -2367,14 +2367,14 @@
               </a:rPr>
               <a:t>フェニレ</a:t>
             </a:r>
-            <a:endParaRPr lang="ja-JP" sz="1100" dirty="0"/>
+            <a:endParaRPr lang="ja-JP" sz="1050" dirty="0"/>
           </a:p>
           <a:p>
             <a:pPr algn="ctr" indent="0" marL="0">
               <a:buNone/>
             </a:pPr>
             <a:r>
-              <a:rPr lang="ja-JP" altLang="en-US" sz="1100" dirty="0">
+              <a:rPr lang="ja-JP" altLang="en-US" sz="1050" dirty="0">
                 <a:solidFill>
                   <a:srgbClr val="404040"/>
                 </a:solidFill>
@@ -2384,7 +2384,7 @@
               </a:rPr>
               <a:t>フリン</a:t>
             </a:r>
-            <a:endParaRPr lang="ja-JP" sz="1100" dirty="0"/>
+            <a:endParaRPr lang="ja-JP" sz="1050" dirty="0"/>
           </a:p>
         </p:txBody>
       </p:sp>
@@ -2401,7 +2401,7 @@
           </a:xfrm>
           <a:prstGeom prst="roundRect">
             <a:avLst>
-              <a:gd name="adj" fmla="val 15625"/>
+              <a:gd name="adj" fmla="val 7813"/>
             </a:avLst>
           </a:prstGeom>
           <a:solidFill>
@@ -2410,14 +2410,14 @@
           <a:ln/>
         </p:spPr>
         <p:txBody>
-          <a:bodyPr wrap="square" lIns="0" tIns="0" rIns="0" bIns="0" rtlCol="0" anchor="ctr"/>
+          <a:bodyPr wrap="none" lIns="0" tIns="0" rIns="0" bIns="0" rtlCol="0" anchor="ctr"/>
           <a:lstStyle/>
           <a:p>
             <a:pPr algn="ctr" indent="0" marL="0">
               <a:buNone/>
             </a:pPr>
             <a:r>
-              <a:rPr lang="ja-JP" altLang="en-US" sz="1100" dirty="0">
+              <a:rPr lang="ja-JP" altLang="en-US" sz="1050" dirty="0">
                 <a:solidFill>
                   <a:srgbClr val="404040"/>
                 </a:solidFill>
@@ -2427,14 +2427,14 @@
               </a:rPr>
               <a:t>エフェ</a:t>
             </a:r>
-            <a:endParaRPr lang="ja-JP" sz="1100" dirty="0"/>
+            <a:endParaRPr lang="ja-JP" sz="1050" dirty="0"/>
           </a:p>
           <a:p>
             <a:pPr algn="ctr" indent="0" marL="0">
               <a:buNone/>
             </a:pPr>
             <a:r>
-              <a:rPr lang="ja-JP" altLang="en-US" sz="1100" dirty="0">
+              <a:rPr lang="ja-JP" altLang="en-US" sz="1050" dirty="0">
                 <a:solidFill>
                   <a:srgbClr val="404040"/>
                 </a:solidFill>
@@ -2444,7 +2444,7 @@
               </a:rPr>
               <a:t>ドリン</a:t>
             </a:r>
-            <a:endParaRPr lang="ja-JP" sz="1100" dirty="0"/>
+            <a:endParaRPr lang="ja-JP" sz="1050" dirty="0"/>
           </a:p>
         </p:txBody>
       </p:sp>
@@ -2461,7 +2461,7 @@
           </a:xfrm>
           <a:prstGeom prst="roundRect">
             <a:avLst>
-              <a:gd name="adj" fmla="val 15625"/>
+              <a:gd name="adj" fmla="val 7813"/>
             </a:avLst>
           </a:prstGeom>
           <a:solidFill>
@@ -2470,14 +2470,14 @@
           <a:ln/>
         </p:spPr>
         <p:txBody>
-          <a:bodyPr wrap="square" lIns="0" tIns="0" rIns="0" bIns="0" rtlCol="0" anchor="ctr"/>
+          <a:bodyPr wrap="none" lIns="0" tIns="0" rIns="0" bIns="0" rtlCol="0" anchor="ctr"/>
           <a:lstStyle/>
           <a:p>
             <a:pPr algn="ctr" indent="0" marL="0">
               <a:buNone/>
             </a:pPr>
             <a:r>
-              <a:rPr lang="ja-JP" altLang="en-US" sz="1100" dirty="0">
+              <a:rPr lang="ja-JP" altLang="en-US" sz="1050" dirty="0">
                 <a:solidFill>
                   <a:srgbClr val="404040"/>
                 </a:solidFill>
@@ -2487,14 +2487,14 @@
               </a:rPr>
               <a:t>ノルアド</a:t>
             </a:r>
-            <a:endParaRPr lang="ja-JP" sz="1100" dirty="0"/>
+            <a:endParaRPr lang="ja-JP" sz="1050" dirty="0"/>
           </a:p>
           <a:p>
             <a:pPr algn="ctr" indent="0" marL="0">
               <a:buNone/>
             </a:pPr>
             <a:r>
-              <a:rPr lang="ja-JP" altLang="en-US" sz="1100" dirty="0">
+              <a:rPr lang="ja-JP" altLang="en-US" sz="1050" dirty="0">
                 <a:solidFill>
                   <a:srgbClr val="404040"/>
                 </a:solidFill>
@@ -2504,7 +2504,7 @@
               </a:rPr>
               <a:t>レナリン</a:t>
             </a:r>
-            <a:endParaRPr lang="ja-JP" sz="1100" dirty="0"/>
+            <a:endParaRPr lang="ja-JP" sz="1050" dirty="0"/>
           </a:p>
         </p:txBody>
       </p:sp>
@@ -2521,7 +2521,7 @@
           </a:xfrm>
           <a:prstGeom prst="roundRect">
             <a:avLst>
-              <a:gd name="adj" fmla="val 15625"/>
+              <a:gd name="adj" fmla="val 7813"/>
             </a:avLst>
           </a:prstGeom>
           <a:solidFill>
@@ -2530,14 +2530,14 @@
           <a:ln/>
         </p:spPr>
         <p:txBody>
-          <a:bodyPr wrap="square" lIns="0" tIns="0" rIns="0" bIns="0" rtlCol="0" anchor="ctr"/>
+          <a:bodyPr wrap="none" lIns="0" tIns="0" rIns="0" bIns="0" rtlCol="0" anchor="ctr"/>
           <a:lstStyle/>
           <a:p>
             <a:pPr algn="ctr" indent="0" marL="0">
               <a:buNone/>
             </a:pPr>
             <a:r>
-              <a:rPr lang="ja-JP" altLang="en-US" sz="1100" b="1" dirty="0">
+              <a:rPr lang="ja-JP" altLang="en-US" sz="1050" b="1" dirty="0">
                 <a:solidFill>
                   <a:srgbClr val="FFFFFF"/>
                 </a:solidFill>
@@ -2547,7 +2547,7 @@
               </a:rPr>
               <a:t>使い分け</a:t>
             </a:r>
-            <a:endParaRPr lang="ja-JP" sz="1100" dirty="0"/>
+            <a:endParaRPr lang="ja-JP" sz="1050" dirty="0"/>
           </a:p>
         </p:txBody>
       </p:sp>
@@ -2637,8 +2637,8 @@
         </p:nvSpPr>
         <p:spPr>
           <a:xfrm>
-            <a:off x="502920" y="1828800"/>
-            <a:ext cx="11155680" cy="3941064"/>
+            <a:off x="502920" y="1691640"/>
+            <a:ext cx="11155680" cy="4480560"/>
           </a:xfrm>
           <a:prstGeom prst="rect">
             <a:avLst/>
@@ -2647,12 +2647,12 @@
           <a:ln/>
         </p:spPr>
         <p:txBody>
-          <a:bodyPr wrap="square" lIns="0" tIns="0" rIns="0" bIns="0" rtlCol="0" anchor="t"/>
+          <a:bodyPr wrap="square" lIns="0" tIns="0" rIns="0" bIns="0" rtlCol="0" anchor="ctr"/>
           <a:lstStyle/>
           <a:p>
             <a:pPr algn="l" marL="406400" indent="-406400">
               <a:spcAft>
-                <a:spcPts val="2400"/>
+                <a:spcPts val="3000"/>
               </a:spcAft>
               <a:buSzPct val="100000"/>
               <a:buChar char="•"/>
@@ -2673,7 +2673,7 @@
           <a:p>
             <a:pPr algn="l" marL="406400" indent="-406400">
               <a:spcAft>
-                <a:spcPts val="2400"/>
+                <a:spcPts val="3000"/>
               </a:spcAft>
               <a:buSzPct val="100000"/>
               <a:buChar char="•"/>
@@ -2705,7 +2705,7 @@
           <a:p>
             <a:pPr algn="l" marL="406400" indent="-406400">
               <a:spcAft>
-                <a:spcPts val="2400"/>
+                <a:spcPts val="3000"/>
               </a:spcAft>
               <a:buSzPct val="100000"/>
               <a:buChar char="•"/>
@@ -2733,9 +2733,9 @@
               <a:t>フェニレフリン 0.05〜0.1 mg ずつ</a:t>
             </a:r>
             <a:r>
-              <a:rPr lang="ja-JP" altLang="en-US" sz="2800" dirty="0">
-                <a:solidFill>
-                  <a:srgbClr val="262626"/>
+              <a:rPr lang="ja-JP" altLang="en-US" sz="2800" b="1" dirty="0">
+                <a:solidFill>
+                  <a:srgbClr val="D55E00"/>
                 </a:solidFill>
                 <a:latin typeface="メイリオ" pitchFamily="34" charset="0"/>
                 <a:ea typeface="メイリオ" pitchFamily="34" charset="-122"/>
@@ -2748,7 +2748,7 @@
           <a:p>
             <a:pPr algn="l" marL="406400" indent="-406400">
               <a:spcAft>
-                <a:spcPts val="2400"/>
+                <a:spcPts val="3000"/>
               </a:spcAft>
               <a:buSzPct val="100000"/>
               <a:buChar char="•"/>
@@ -2780,7 +2780,7 @@
           <a:p>
             <a:pPr algn="l" marL="406400" indent="-406400">
               <a:spcAft>
-                <a:spcPts val="2400"/>
+                <a:spcPts val="3000"/>
               </a:spcAft>
               <a:buSzPct val="100000"/>
               <a:buChar char="•"/>
@@ -2788,7 +2788,7 @@
             <a:r>
               <a:rPr lang="ja-JP" altLang="en-US" sz="2800" b="1" dirty="0">
                 <a:solidFill>
-                  <a:srgbClr val="00A8AA"/>
+                  <a:srgbClr val="0072B2"/>
                 </a:solidFill>
                 <a:latin typeface="メイリオ" pitchFamily="34" charset="0"/>
                 <a:ea typeface="メイリオ" pitchFamily="34" charset="-122"/>
@@ -2920,7 +2920,7 @@
           </a:xfrm>
           <a:prstGeom prst="roundRect">
             <a:avLst>
-              <a:gd name="adj" fmla="val 15625"/>
+              <a:gd name="adj" fmla="val 7813"/>
             </a:avLst>
           </a:prstGeom>
           <a:solidFill>
@@ -2929,14 +2929,14 @@
           <a:ln/>
         </p:spPr>
         <p:txBody>
-          <a:bodyPr wrap="square" lIns="0" tIns="0" rIns="0" bIns="0" rtlCol="0" anchor="ctr"/>
+          <a:bodyPr wrap="none" lIns="0" tIns="0" rIns="0" bIns="0" rtlCol="0" anchor="ctr"/>
           <a:lstStyle/>
           <a:p>
             <a:pPr algn="ctr" indent="0" marL="0">
               <a:buNone/>
             </a:pPr>
             <a:r>
-              <a:rPr lang="ja-JP" altLang="en-US" sz="1100" b="1" dirty="0">
+              <a:rPr lang="ja-JP" altLang="en-US" sz="1050" b="1" dirty="0">
                 <a:solidFill>
                   <a:srgbClr val="FFFFFF"/>
                 </a:solidFill>
@@ -2946,14 +2946,14 @@
               </a:rPr>
               <a:t>4つの</a:t>
             </a:r>
-            <a:endParaRPr lang="ja-JP" sz="1100" dirty="0"/>
+            <a:endParaRPr lang="ja-JP" sz="1050" dirty="0"/>
           </a:p>
           <a:p>
             <a:pPr algn="ctr" indent="0" marL="0">
               <a:buNone/>
             </a:pPr>
             <a:r>
-              <a:rPr lang="ja-JP" altLang="en-US" sz="1100" b="1" dirty="0">
+              <a:rPr lang="ja-JP" altLang="en-US" sz="1050" b="1" dirty="0">
                 <a:solidFill>
                   <a:srgbClr val="FFFFFF"/>
                 </a:solidFill>
@@ -2963,7 +2963,7 @@
               </a:rPr>
               <a:t>要素</a:t>
             </a:r>
-            <a:endParaRPr lang="ja-JP" sz="1100" dirty="0"/>
+            <a:endParaRPr lang="ja-JP" sz="1050" dirty="0"/>
           </a:p>
         </p:txBody>
       </p:sp>
@@ -2980,7 +2980,7 @@
           </a:xfrm>
           <a:prstGeom prst="roundRect">
             <a:avLst>
-              <a:gd name="adj" fmla="val 15625"/>
+              <a:gd name="adj" fmla="val 7813"/>
             </a:avLst>
           </a:prstGeom>
           <a:solidFill>
@@ -2989,14 +2989,14 @@
           <a:ln/>
         </p:spPr>
         <p:txBody>
-          <a:bodyPr wrap="square" lIns="0" tIns="0" rIns="0" bIns="0" rtlCol="0" anchor="ctr"/>
+          <a:bodyPr wrap="none" lIns="0" tIns="0" rIns="0" bIns="0" rtlCol="0" anchor="ctr"/>
           <a:lstStyle/>
           <a:p>
             <a:pPr algn="ctr" indent="0" marL="0">
               <a:buNone/>
             </a:pPr>
             <a:r>
-              <a:rPr lang="ja-JP" altLang="en-US" sz="1100" dirty="0">
+              <a:rPr lang="ja-JP" altLang="en-US" sz="1050" dirty="0">
                 <a:solidFill>
                   <a:srgbClr val="404040"/>
                 </a:solidFill>
@@ -3006,14 +3006,14 @@
               </a:rPr>
               <a:t>フェニレ</a:t>
             </a:r>
-            <a:endParaRPr lang="ja-JP" sz="1100" dirty="0"/>
+            <a:endParaRPr lang="ja-JP" sz="1050" dirty="0"/>
           </a:p>
           <a:p>
             <a:pPr algn="ctr" indent="0" marL="0">
               <a:buNone/>
             </a:pPr>
             <a:r>
-              <a:rPr lang="ja-JP" altLang="en-US" sz="1100" dirty="0">
+              <a:rPr lang="ja-JP" altLang="en-US" sz="1050" dirty="0">
                 <a:solidFill>
                   <a:srgbClr val="404040"/>
                 </a:solidFill>
@@ -3023,7 +3023,7 @@
               </a:rPr>
               <a:t>フリン</a:t>
             </a:r>
-            <a:endParaRPr lang="ja-JP" sz="1100" dirty="0"/>
+            <a:endParaRPr lang="ja-JP" sz="1050" dirty="0"/>
           </a:p>
         </p:txBody>
       </p:sp>
@@ -3040,7 +3040,7 @@
           </a:xfrm>
           <a:prstGeom prst="roundRect">
             <a:avLst>
-              <a:gd name="adj" fmla="val 15625"/>
+              <a:gd name="adj" fmla="val 7813"/>
             </a:avLst>
           </a:prstGeom>
           <a:solidFill>
@@ -3049,14 +3049,14 @@
           <a:ln/>
         </p:spPr>
         <p:txBody>
-          <a:bodyPr wrap="square" lIns="0" tIns="0" rIns="0" bIns="0" rtlCol="0" anchor="ctr"/>
+          <a:bodyPr wrap="none" lIns="0" tIns="0" rIns="0" bIns="0" rtlCol="0" anchor="ctr"/>
           <a:lstStyle/>
           <a:p>
             <a:pPr algn="ctr" indent="0" marL="0">
               <a:buNone/>
             </a:pPr>
             <a:r>
-              <a:rPr lang="ja-JP" altLang="en-US" sz="1100" dirty="0">
+              <a:rPr lang="ja-JP" altLang="en-US" sz="1050" dirty="0">
                 <a:solidFill>
                   <a:srgbClr val="404040"/>
                 </a:solidFill>
@@ -3066,14 +3066,14 @@
               </a:rPr>
               <a:t>エフェ</a:t>
             </a:r>
-            <a:endParaRPr lang="ja-JP" sz="1100" dirty="0"/>
+            <a:endParaRPr lang="ja-JP" sz="1050" dirty="0"/>
           </a:p>
           <a:p>
             <a:pPr algn="ctr" indent="0" marL="0">
               <a:buNone/>
             </a:pPr>
             <a:r>
-              <a:rPr lang="ja-JP" altLang="en-US" sz="1100" dirty="0">
+              <a:rPr lang="ja-JP" altLang="en-US" sz="1050" dirty="0">
                 <a:solidFill>
                   <a:srgbClr val="404040"/>
                 </a:solidFill>
@@ -3083,7 +3083,7 @@
               </a:rPr>
               <a:t>ドリン</a:t>
             </a:r>
-            <a:endParaRPr lang="ja-JP" sz="1100" dirty="0"/>
+            <a:endParaRPr lang="ja-JP" sz="1050" dirty="0"/>
           </a:p>
         </p:txBody>
       </p:sp>
@@ -3100,7 +3100,7 @@
           </a:xfrm>
           <a:prstGeom prst="roundRect">
             <a:avLst>
-              <a:gd name="adj" fmla="val 15625"/>
+              <a:gd name="adj" fmla="val 7813"/>
             </a:avLst>
           </a:prstGeom>
           <a:solidFill>
@@ -3109,14 +3109,14 @@
           <a:ln/>
         </p:spPr>
         <p:txBody>
-          <a:bodyPr wrap="square" lIns="0" tIns="0" rIns="0" bIns="0" rtlCol="0" anchor="ctr"/>
+          <a:bodyPr wrap="none" lIns="0" tIns="0" rIns="0" bIns="0" rtlCol="0" anchor="ctr"/>
           <a:lstStyle/>
           <a:p>
             <a:pPr algn="ctr" indent="0" marL="0">
               <a:buNone/>
             </a:pPr>
             <a:r>
-              <a:rPr lang="ja-JP" altLang="en-US" sz="1100" dirty="0">
+              <a:rPr lang="ja-JP" altLang="en-US" sz="1050" dirty="0">
                 <a:solidFill>
                   <a:srgbClr val="404040"/>
                 </a:solidFill>
@@ -3126,14 +3126,14 @@
               </a:rPr>
               <a:t>ノルアド</a:t>
             </a:r>
-            <a:endParaRPr lang="ja-JP" sz="1100" dirty="0"/>
+            <a:endParaRPr lang="ja-JP" sz="1050" dirty="0"/>
           </a:p>
           <a:p>
             <a:pPr algn="ctr" indent="0" marL="0">
               <a:buNone/>
             </a:pPr>
             <a:r>
-              <a:rPr lang="ja-JP" altLang="en-US" sz="1100" dirty="0">
+              <a:rPr lang="ja-JP" altLang="en-US" sz="1050" dirty="0">
                 <a:solidFill>
                   <a:srgbClr val="404040"/>
                 </a:solidFill>
@@ -3143,7 +3143,7 @@
               </a:rPr>
               <a:t>レナリン</a:t>
             </a:r>
-            <a:endParaRPr lang="ja-JP" sz="1100" dirty="0"/>
+            <a:endParaRPr lang="ja-JP" sz="1050" dirty="0"/>
           </a:p>
         </p:txBody>
       </p:sp>
@@ -3160,7 +3160,7 @@
           </a:xfrm>
           <a:prstGeom prst="roundRect">
             <a:avLst>
-              <a:gd name="adj" fmla="val 15625"/>
+              <a:gd name="adj" fmla="val 7813"/>
             </a:avLst>
           </a:prstGeom>
           <a:solidFill>
@@ -3169,14 +3169,14 @@
           <a:ln/>
         </p:spPr>
         <p:txBody>
-          <a:bodyPr wrap="square" lIns="0" tIns="0" rIns="0" bIns="0" rtlCol="0" anchor="ctr"/>
+          <a:bodyPr wrap="none" lIns="0" tIns="0" rIns="0" bIns="0" rtlCol="0" anchor="ctr"/>
           <a:lstStyle/>
           <a:p>
             <a:pPr algn="ctr" indent="0" marL="0">
               <a:buNone/>
             </a:pPr>
             <a:r>
-              <a:rPr lang="ja-JP" altLang="en-US" sz="1100" dirty="0">
+              <a:rPr lang="ja-JP" altLang="en-US" sz="1050" dirty="0">
                 <a:solidFill>
                   <a:srgbClr val="404040"/>
                 </a:solidFill>
@@ -3186,7 +3186,7 @@
               </a:rPr>
               <a:t>使い分け</a:t>
             </a:r>
-            <a:endParaRPr lang="ja-JP" sz="1100" dirty="0"/>
+            <a:endParaRPr lang="ja-JP" sz="1050" dirty="0"/>
           </a:p>
         </p:txBody>
       </p:sp>
@@ -3737,7 +3737,7 @@
           </a:xfrm>
           <a:prstGeom prst="roundRect">
             <a:avLst>
-              <a:gd name="adj" fmla="val 15625"/>
+              <a:gd name="adj" fmla="val 7813"/>
             </a:avLst>
           </a:prstGeom>
           <a:solidFill>
@@ -3746,14 +3746,14 @@
           <a:ln/>
         </p:spPr>
         <p:txBody>
-          <a:bodyPr wrap="square" lIns="0" tIns="0" rIns="0" bIns="0" rtlCol="0" anchor="ctr"/>
+          <a:bodyPr wrap="none" lIns="0" tIns="0" rIns="0" bIns="0" rtlCol="0" anchor="ctr"/>
           <a:lstStyle/>
           <a:p>
             <a:pPr algn="ctr" indent="0" marL="0">
               <a:buNone/>
             </a:pPr>
             <a:r>
-              <a:rPr lang="ja-JP" altLang="en-US" sz="1100" b="1" dirty="0">
+              <a:rPr lang="ja-JP" altLang="en-US" sz="1050" b="1" dirty="0">
                 <a:solidFill>
                   <a:srgbClr val="FFFFFF"/>
                 </a:solidFill>
@@ -3763,14 +3763,14 @@
               </a:rPr>
               <a:t>4つの</a:t>
             </a:r>
-            <a:endParaRPr lang="ja-JP" sz="1100" dirty="0"/>
+            <a:endParaRPr lang="ja-JP" sz="1050" dirty="0"/>
           </a:p>
           <a:p>
             <a:pPr algn="ctr" indent="0" marL="0">
               <a:buNone/>
             </a:pPr>
             <a:r>
-              <a:rPr lang="ja-JP" altLang="en-US" sz="1100" b="1" dirty="0">
+              <a:rPr lang="ja-JP" altLang="en-US" sz="1050" b="1" dirty="0">
                 <a:solidFill>
                   <a:srgbClr val="FFFFFF"/>
                 </a:solidFill>
@@ -3780,7 +3780,7 @@
               </a:rPr>
               <a:t>要素</a:t>
             </a:r>
-            <a:endParaRPr lang="ja-JP" sz="1100" dirty="0"/>
+            <a:endParaRPr lang="ja-JP" sz="1050" dirty="0"/>
           </a:p>
         </p:txBody>
       </p:sp>
@@ -3797,7 +3797,7 @@
           </a:xfrm>
           <a:prstGeom prst="roundRect">
             <a:avLst>
-              <a:gd name="adj" fmla="val 15625"/>
+              <a:gd name="adj" fmla="val 7813"/>
             </a:avLst>
           </a:prstGeom>
           <a:solidFill>
@@ -3806,14 +3806,14 @@
           <a:ln/>
         </p:spPr>
         <p:txBody>
-          <a:bodyPr wrap="square" lIns="0" tIns="0" rIns="0" bIns="0" rtlCol="0" anchor="ctr"/>
+          <a:bodyPr wrap="none" lIns="0" tIns="0" rIns="0" bIns="0" rtlCol="0" anchor="ctr"/>
           <a:lstStyle/>
           <a:p>
             <a:pPr algn="ctr" indent="0" marL="0">
               <a:buNone/>
             </a:pPr>
             <a:r>
-              <a:rPr lang="ja-JP" altLang="en-US" sz="1100" dirty="0">
+              <a:rPr lang="ja-JP" altLang="en-US" sz="1050" dirty="0">
                 <a:solidFill>
                   <a:srgbClr val="404040"/>
                 </a:solidFill>
@@ -3823,14 +3823,14 @@
               </a:rPr>
               <a:t>フェニレ</a:t>
             </a:r>
-            <a:endParaRPr lang="ja-JP" sz="1100" dirty="0"/>
+            <a:endParaRPr lang="ja-JP" sz="1050" dirty="0"/>
           </a:p>
           <a:p>
             <a:pPr algn="ctr" indent="0" marL="0">
               <a:buNone/>
             </a:pPr>
             <a:r>
-              <a:rPr lang="ja-JP" altLang="en-US" sz="1100" dirty="0">
+              <a:rPr lang="ja-JP" altLang="en-US" sz="1050" dirty="0">
                 <a:solidFill>
                   <a:srgbClr val="404040"/>
                 </a:solidFill>
@@ -3840,7 +3840,7 @@
               </a:rPr>
               <a:t>フリン</a:t>
             </a:r>
-            <a:endParaRPr lang="ja-JP" sz="1100" dirty="0"/>
+            <a:endParaRPr lang="ja-JP" sz="1050" dirty="0"/>
           </a:p>
         </p:txBody>
       </p:sp>
@@ -3857,7 +3857,7 @@
           </a:xfrm>
           <a:prstGeom prst="roundRect">
             <a:avLst>
-              <a:gd name="adj" fmla="val 15625"/>
+              <a:gd name="adj" fmla="val 7813"/>
             </a:avLst>
           </a:prstGeom>
           <a:solidFill>
@@ -3866,14 +3866,14 @@
           <a:ln/>
         </p:spPr>
         <p:txBody>
-          <a:bodyPr wrap="square" lIns="0" tIns="0" rIns="0" bIns="0" rtlCol="0" anchor="ctr"/>
+          <a:bodyPr wrap="none" lIns="0" tIns="0" rIns="0" bIns="0" rtlCol="0" anchor="ctr"/>
           <a:lstStyle/>
           <a:p>
             <a:pPr algn="ctr" indent="0" marL="0">
               <a:buNone/>
             </a:pPr>
             <a:r>
-              <a:rPr lang="ja-JP" altLang="en-US" sz="1100" dirty="0">
+              <a:rPr lang="ja-JP" altLang="en-US" sz="1050" dirty="0">
                 <a:solidFill>
                   <a:srgbClr val="404040"/>
                 </a:solidFill>
@@ -3883,14 +3883,14 @@
               </a:rPr>
               <a:t>エフェ</a:t>
             </a:r>
-            <a:endParaRPr lang="ja-JP" sz="1100" dirty="0"/>
+            <a:endParaRPr lang="ja-JP" sz="1050" dirty="0"/>
           </a:p>
           <a:p>
             <a:pPr algn="ctr" indent="0" marL="0">
               <a:buNone/>
             </a:pPr>
             <a:r>
-              <a:rPr lang="ja-JP" altLang="en-US" sz="1100" dirty="0">
+              <a:rPr lang="ja-JP" altLang="en-US" sz="1050" dirty="0">
                 <a:solidFill>
                   <a:srgbClr val="404040"/>
                 </a:solidFill>
@@ -3900,7 +3900,7 @@
               </a:rPr>
               <a:t>ドリン</a:t>
             </a:r>
-            <a:endParaRPr lang="ja-JP" sz="1100" dirty="0"/>
+            <a:endParaRPr lang="ja-JP" sz="1050" dirty="0"/>
           </a:p>
         </p:txBody>
       </p:sp>
@@ -3917,7 +3917,7 @@
           </a:xfrm>
           <a:prstGeom prst="roundRect">
             <a:avLst>
-              <a:gd name="adj" fmla="val 15625"/>
+              <a:gd name="adj" fmla="val 7813"/>
             </a:avLst>
           </a:prstGeom>
           <a:solidFill>
@@ -3926,14 +3926,14 @@
           <a:ln/>
         </p:spPr>
         <p:txBody>
-          <a:bodyPr wrap="square" lIns="0" tIns="0" rIns="0" bIns="0" rtlCol="0" anchor="ctr"/>
+          <a:bodyPr wrap="none" lIns="0" tIns="0" rIns="0" bIns="0" rtlCol="0" anchor="ctr"/>
           <a:lstStyle/>
           <a:p>
             <a:pPr algn="ctr" indent="0" marL="0">
               <a:buNone/>
             </a:pPr>
             <a:r>
-              <a:rPr lang="ja-JP" altLang="en-US" sz="1100" dirty="0">
+              <a:rPr lang="ja-JP" altLang="en-US" sz="1050" dirty="0">
                 <a:solidFill>
                   <a:srgbClr val="404040"/>
                 </a:solidFill>
@@ -3943,14 +3943,14 @@
               </a:rPr>
               <a:t>ノルアド</a:t>
             </a:r>
-            <a:endParaRPr lang="ja-JP" sz="1100" dirty="0"/>
+            <a:endParaRPr lang="ja-JP" sz="1050" dirty="0"/>
           </a:p>
           <a:p>
             <a:pPr algn="ctr" indent="0" marL="0">
               <a:buNone/>
             </a:pPr>
             <a:r>
-              <a:rPr lang="ja-JP" altLang="en-US" sz="1100" dirty="0">
+              <a:rPr lang="ja-JP" altLang="en-US" sz="1050" dirty="0">
                 <a:solidFill>
                   <a:srgbClr val="404040"/>
                 </a:solidFill>
@@ -3960,7 +3960,7 @@
               </a:rPr>
               <a:t>レナリン</a:t>
             </a:r>
-            <a:endParaRPr lang="ja-JP" sz="1100" dirty="0"/>
+            <a:endParaRPr lang="ja-JP" sz="1050" dirty="0"/>
           </a:p>
         </p:txBody>
       </p:sp>
@@ -3977,7 +3977,7 @@
           </a:xfrm>
           <a:prstGeom prst="roundRect">
             <a:avLst>
-              <a:gd name="adj" fmla="val 15625"/>
+              <a:gd name="adj" fmla="val 7813"/>
             </a:avLst>
           </a:prstGeom>
           <a:solidFill>
@@ -3986,14 +3986,14 @@
           <a:ln/>
         </p:spPr>
         <p:txBody>
-          <a:bodyPr wrap="square" lIns="0" tIns="0" rIns="0" bIns="0" rtlCol="0" anchor="ctr"/>
+          <a:bodyPr wrap="none" lIns="0" tIns="0" rIns="0" bIns="0" rtlCol="0" anchor="ctr"/>
           <a:lstStyle/>
           <a:p>
             <a:pPr algn="ctr" indent="0" marL="0">
               <a:buNone/>
             </a:pPr>
             <a:r>
-              <a:rPr lang="ja-JP" altLang="en-US" sz="1100" dirty="0">
+              <a:rPr lang="ja-JP" altLang="en-US" sz="1050" dirty="0">
                 <a:solidFill>
                   <a:srgbClr val="404040"/>
                 </a:solidFill>
@@ -4003,7 +4003,7 @@
               </a:rPr>
               <a:t>使い分け</a:t>
             </a:r>
-            <a:endParaRPr lang="ja-JP" sz="1100" dirty="0"/>
+            <a:endParaRPr lang="ja-JP" sz="1050" dirty="0"/>
           </a:p>
         </p:txBody>
       </p:sp>
@@ -5639,7 +5639,7 @@
           </a:xfrm>
           <a:prstGeom prst="roundRect">
             <a:avLst>
-              <a:gd name="adj" fmla="val 15625"/>
+              <a:gd name="adj" fmla="val 7813"/>
             </a:avLst>
           </a:prstGeom>
           <a:solidFill>
@@ -5648,14 +5648,14 @@
           <a:ln/>
         </p:spPr>
         <p:txBody>
-          <a:bodyPr wrap="square" lIns="0" tIns="0" rIns="0" bIns="0" rtlCol="0" anchor="ctr"/>
+          <a:bodyPr wrap="none" lIns="0" tIns="0" rIns="0" bIns="0" rtlCol="0" anchor="ctr"/>
           <a:lstStyle/>
           <a:p>
             <a:pPr algn="ctr" indent="0" marL="0">
               <a:buNone/>
             </a:pPr>
             <a:r>
-              <a:rPr lang="ja-JP" altLang="en-US" sz="1100" dirty="0">
+              <a:rPr lang="ja-JP" altLang="en-US" sz="1050" dirty="0">
                 <a:solidFill>
                   <a:srgbClr val="404040"/>
                 </a:solidFill>
@@ -5665,14 +5665,14 @@
               </a:rPr>
               <a:t>4つの</a:t>
             </a:r>
-            <a:endParaRPr lang="ja-JP" sz="1100" dirty="0"/>
+            <a:endParaRPr lang="ja-JP" sz="1050" dirty="0"/>
           </a:p>
           <a:p>
             <a:pPr algn="ctr" indent="0" marL="0">
               <a:buNone/>
             </a:pPr>
             <a:r>
-              <a:rPr lang="ja-JP" altLang="en-US" sz="1100" dirty="0">
+              <a:rPr lang="ja-JP" altLang="en-US" sz="1050" dirty="0">
                 <a:solidFill>
                   <a:srgbClr val="404040"/>
                 </a:solidFill>
@@ -5682,7 +5682,7 @@
               </a:rPr>
               <a:t>要素</a:t>
             </a:r>
-            <a:endParaRPr lang="ja-JP" sz="1100" dirty="0"/>
+            <a:endParaRPr lang="ja-JP" sz="1050" dirty="0"/>
           </a:p>
         </p:txBody>
       </p:sp>
@@ -5699,7 +5699,7 @@
           </a:xfrm>
           <a:prstGeom prst="roundRect">
             <a:avLst>
-              <a:gd name="adj" fmla="val 15625"/>
+              <a:gd name="adj" fmla="val 7813"/>
             </a:avLst>
           </a:prstGeom>
           <a:solidFill>
@@ -5708,14 +5708,14 @@
           <a:ln/>
         </p:spPr>
         <p:txBody>
-          <a:bodyPr wrap="square" lIns="0" tIns="0" rIns="0" bIns="0" rtlCol="0" anchor="ctr"/>
+          <a:bodyPr wrap="none" lIns="0" tIns="0" rIns="0" bIns="0" rtlCol="0" anchor="ctr"/>
           <a:lstStyle/>
           <a:p>
             <a:pPr algn="ctr" indent="0" marL="0">
               <a:buNone/>
             </a:pPr>
             <a:r>
-              <a:rPr lang="ja-JP" altLang="en-US" sz="1100" b="1" dirty="0">
+              <a:rPr lang="ja-JP" altLang="en-US" sz="1050" b="1" dirty="0">
                 <a:solidFill>
                   <a:srgbClr val="FFFFFF"/>
                 </a:solidFill>
@@ -5725,14 +5725,14 @@
               </a:rPr>
               <a:t>フェニレ</a:t>
             </a:r>
-            <a:endParaRPr lang="ja-JP" sz="1100" dirty="0"/>
+            <a:endParaRPr lang="ja-JP" sz="1050" dirty="0"/>
           </a:p>
           <a:p>
             <a:pPr algn="ctr" indent="0" marL="0">
               <a:buNone/>
             </a:pPr>
             <a:r>
-              <a:rPr lang="ja-JP" altLang="en-US" sz="1100" b="1" dirty="0">
+              <a:rPr lang="ja-JP" altLang="en-US" sz="1050" b="1" dirty="0">
                 <a:solidFill>
                   <a:srgbClr val="FFFFFF"/>
                 </a:solidFill>
@@ -5742,7 +5742,7 @@
               </a:rPr>
               <a:t>フリン</a:t>
             </a:r>
-            <a:endParaRPr lang="ja-JP" sz="1100" dirty="0"/>
+            <a:endParaRPr lang="ja-JP" sz="1050" dirty="0"/>
           </a:p>
         </p:txBody>
       </p:sp>
@@ -5759,7 +5759,7 @@
           </a:xfrm>
           <a:prstGeom prst="roundRect">
             <a:avLst>
-              <a:gd name="adj" fmla="val 15625"/>
+              <a:gd name="adj" fmla="val 7813"/>
             </a:avLst>
           </a:prstGeom>
           <a:solidFill>
@@ -5768,14 +5768,14 @@
           <a:ln/>
         </p:spPr>
         <p:txBody>
-          <a:bodyPr wrap="square" lIns="0" tIns="0" rIns="0" bIns="0" rtlCol="0" anchor="ctr"/>
+          <a:bodyPr wrap="none" lIns="0" tIns="0" rIns="0" bIns="0" rtlCol="0" anchor="ctr"/>
           <a:lstStyle/>
           <a:p>
             <a:pPr algn="ctr" indent="0" marL="0">
               <a:buNone/>
             </a:pPr>
             <a:r>
-              <a:rPr lang="ja-JP" altLang="en-US" sz="1100" dirty="0">
+              <a:rPr lang="ja-JP" altLang="en-US" sz="1050" dirty="0">
                 <a:solidFill>
                   <a:srgbClr val="404040"/>
                 </a:solidFill>
@@ -5785,14 +5785,14 @@
               </a:rPr>
               <a:t>エフェ</a:t>
             </a:r>
-            <a:endParaRPr lang="ja-JP" sz="1100" dirty="0"/>
+            <a:endParaRPr lang="ja-JP" sz="1050" dirty="0"/>
           </a:p>
           <a:p>
             <a:pPr algn="ctr" indent="0" marL="0">
               <a:buNone/>
             </a:pPr>
             <a:r>
-              <a:rPr lang="ja-JP" altLang="en-US" sz="1100" dirty="0">
+              <a:rPr lang="ja-JP" altLang="en-US" sz="1050" dirty="0">
                 <a:solidFill>
                   <a:srgbClr val="404040"/>
                 </a:solidFill>
@@ -5802,7 +5802,7 @@
               </a:rPr>
               <a:t>ドリン</a:t>
             </a:r>
-            <a:endParaRPr lang="ja-JP" sz="1100" dirty="0"/>
+            <a:endParaRPr lang="ja-JP" sz="1050" dirty="0"/>
           </a:p>
         </p:txBody>
       </p:sp>
@@ -5819,7 +5819,7 @@
           </a:xfrm>
           <a:prstGeom prst="roundRect">
             <a:avLst>
-              <a:gd name="adj" fmla="val 15625"/>
+              <a:gd name="adj" fmla="val 7813"/>
             </a:avLst>
           </a:prstGeom>
           <a:solidFill>
@@ -5828,14 +5828,14 @@
           <a:ln/>
         </p:spPr>
         <p:txBody>
-          <a:bodyPr wrap="square" lIns="0" tIns="0" rIns="0" bIns="0" rtlCol="0" anchor="ctr"/>
+          <a:bodyPr wrap="none" lIns="0" tIns="0" rIns="0" bIns="0" rtlCol="0" anchor="ctr"/>
           <a:lstStyle/>
           <a:p>
             <a:pPr algn="ctr" indent="0" marL="0">
               <a:buNone/>
             </a:pPr>
             <a:r>
-              <a:rPr lang="ja-JP" altLang="en-US" sz="1100" dirty="0">
+              <a:rPr lang="ja-JP" altLang="en-US" sz="1050" dirty="0">
                 <a:solidFill>
                   <a:srgbClr val="404040"/>
                 </a:solidFill>
@@ -5845,14 +5845,14 @@
               </a:rPr>
               <a:t>ノルアド</a:t>
             </a:r>
-            <a:endParaRPr lang="ja-JP" sz="1100" dirty="0"/>
+            <a:endParaRPr lang="ja-JP" sz="1050" dirty="0"/>
           </a:p>
           <a:p>
             <a:pPr algn="ctr" indent="0" marL="0">
               <a:buNone/>
             </a:pPr>
             <a:r>
-              <a:rPr lang="ja-JP" altLang="en-US" sz="1100" dirty="0">
+              <a:rPr lang="ja-JP" altLang="en-US" sz="1050" dirty="0">
                 <a:solidFill>
                   <a:srgbClr val="404040"/>
                 </a:solidFill>
@@ -5862,7 +5862,7 @@
               </a:rPr>
               <a:t>レナリン</a:t>
             </a:r>
-            <a:endParaRPr lang="ja-JP" sz="1100" dirty="0"/>
+            <a:endParaRPr lang="ja-JP" sz="1050" dirty="0"/>
           </a:p>
         </p:txBody>
       </p:sp>
@@ -5879,7 +5879,7 @@
           </a:xfrm>
           <a:prstGeom prst="roundRect">
             <a:avLst>
-              <a:gd name="adj" fmla="val 15625"/>
+              <a:gd name="adj" fmla="val 7813"/>
             </a:avLst>
           </a:prstGeom>
           <a:solidFill>
@@ -5888,14 +5888,14 @@
           <a:ln/>
         </p:spPr>
         <p:txBody>
-          <a:bodyPr wrap="square" lIns="0" tIns="0" rIns="0" bIns="0" rtlCol="0" anchor="ctr"/>
+          <a:bodyPr wrap="none" lIns="0" tIns="0" rIns="0" bIns="0" rtlCol="0" anchor="ctr"/>
           <a:lstStyle/>
           <a:p>
             <a:pPr algn="ctr" indent="0" marL="0">
               <a:buNone/>
             </a:pPr>
             <a:r>
-              <a:rPr lang="ja-JP" altLang="en-US" sz="1100" dirty="0">
+              <a:rPr lang="ja-JP" altLang="en-US" sz="1050" dirty="0">
                 <a:solidFill>
                   <a:srgbClr val="404040"/>
                 </a:solidFill>
@@ -5905,7 +5905,7 @@
               </a:rPr>
               <a:t>使い分け</a:t>
             </a:r>
-            <a:endParaRPr lang="ja-JP" sz="1100" dirty="0"/>
+            <a:endParaRPr lang="ja-JP" sz="1050" dirty="0"/>
           </a:p>
         </p:txBody>
       </p:sp>
@@ -6013,11 +6013,11 @@
         <p:spPr>
           <a:xfrm>
             <a:off x="502920" y="1691640"/>
-            <a:ext cx="4219956" cy="4151376"/>
+            <a:ext cx="4219042" cy="4169664"/>
           </a:xfrm>
           <a:prstGeom prst="roundRect">
             <a:avLst>
-              <a:gd name="adj" fmla="val 1762"/>
+              <a:gd name="adj" fmla="val 1754"/>
             </a:avLst>
           </a:prstGeom>
           <a:solidFill>
@@ -6035,7 +6035,7 @@
         <p:spPr>
           <a:xfrm>
             <a:off x="630936" y="1819656"/>
-            <a:ext cx="3963924" cy="457200"/>
+            <a:ext cx="3963010" cy="457200"/>
           </a:xfrm>
           <a:prstGeom prst="rect">
             <a:avLst/>
@@ -6074,7 +6074,7 @@
         <p:spPr>
           <a:xfrm>
             <a:off x="630936" y="2350008"/>
-            <a:ext cx="3963924" cy="859536"/>
+            <a:ext cx="3963010" cy="859536"/>
           </a:xfrm>
           <a:prstGeom prst="rect">
             <a:avLst/>
@@ -6101,7 +6101,7 @@
                 <a:ea typeface="メイリオ" pitchFamily="34" charset="-122"/>
                 <a:cs typeface="メイリオ" pitchFamily="34" charset="-120"/>
               </a:rPr>
-              <a:t>添付文書：</a:t>
+              <a:t>添付文書：1 回 </a:t>
             </a:r>
             <a:r>
               <a:rPr lang="ja-JP" altLang="en-US" sz="2200" b="1" dirty="0">
@@ -6112,7 +6112,7 @@
                 <a:ea typeface="メイリオ" pitchFamily="34" charset="-122"/>
                 <a:cs typeface="メイリオ" pitchFamily="34" charset="-120"/>
               </a:rPr>
-              <a:t>1 回 0.2 mg</a:t>
+              <a:t>0.2 mg</a:t>
             </a:r>
             <a:r>
               <a:rPr lang="ja-JP" altLang="en-US" sz="2200" dirty="0">
@@ -6158,7 +6158,7 @@
         <p:spPr>
           <a:xfrm>
             <a:off x="630936" y="3300984"/>
-            <a:ext cx="3963924" cy="0"/>
+            <a:ext cx="3963010" cy="0"/>
           </a:xfrm>
           <a:prstGeom prst="line">
             <a:avLst/>
@@ -6181,7 +6181,7 @@
         <p:spPr>
           <a:xfrm>
             <a:off x="630936" y="3392424"/>
-            <a:ext cx="3963924" cy="420624"/>
+            <a:ext cx="3963010" cy="420624"/>
           </a:xfrm>
           <a:prstGeom prst="rect">
             <a:avLst/>
@@ -6223,7 +6223,7 @@
         <p:spPr>
           <a:xfrm>
             <a:off x="630936" y="3904488"/>
-            <a:ext cx="3963924" cy="0"/>
+            <a:ext cx="3963010" cy="0"/>
           </a:xfrm>
           <a:prstGeom prst="line">
             <a:avLst/>
@@ -6246,7 +6246,7 @@
         <p:spPr>
           <a:xfrm>
             <a:off x="630936" y="3995928"/>
-            <a:ext cx="3963924" cy="1719072"/>
+            <a:ext cx="3963010" cy="1719072"/>
           </a:xfrm>
           <a:prstGeom prst="rect">
             <a:avLst/>
@@ -6369,8 +6369,8 @@
         </p:nvSpPr>
         <p:spPr>
           <a:xfrm>
-            <a:off x="4942332" y="1691640"/>
-            <a:ext cx="3105302" cy="4151376"/>
+            <a:off x="4941418" y="1691640"/>
+            <a:ext cx="3105302" cy="4169664"/>
           </a:xfrm>
           <a:prstGeom prst="roundRect">
             <a:avLst>
@@ -6391,7 +6391,7 @@
         </p:nvSpPr>
         <p:spPr>
           <a:xfrm>
-            <a:off x="5070348" y="1819656"/>
+            <a:off x="5069434" y="1819656"/>
             <a:ext cx="2849270" cy="457200"/>
           </a:xfrm>
           <a:prstGeom prst="rect">
@@ -6410,7 +6410,7 @@
             <a:r>
               <a:rPr lang="ja-JP" altLang="en-US" sz="2400" b="1" dirty="0">
                 <a:solidFill>
-                  <a:srgbClr val="00A8AA"/>
+                  <a:srgbClr val="0072B2"/>
                 </a:solidFill>
                 <a:latin typeface="メイリオ" pitchFamily="34" charset="0"/>
                 <a:ea typeface="メイリオ" pitchFamily="34" charset="-122"/>
@@ -6430,7 +6430,7 @@
         </p:nvSpPr>
         <p:spPr>
           <a:xfrm>
-            <a:off x="5070348" y="2350008"/>
+            <a:off x="5069434" y="2350008"/>
             <a:ext cx="2849270" cy="420624"/>
           </a:xfrm>
           <a:prstGeom prst="rect">
@@ -6472,7 +6472,7 @@
         </p:nvSpPr>
         <p:spPr>
           <a:xfrm>
-            <a:off x="5070348" y="2862072"/>
+            <a:off x="5069434" y="2862072"/>
             <a:ext cx="2849270" cy="0"/>
           </a:xfrm>
           <a:prstGeom prst="line">
@@ -6495,7 +6495,7 @@
         </p:nvSpPr>
         <p:spPr>
           <a:xfrm>
-            <a:off x="5070348" y="2953512"/>
+            <a:off x="5069434" y="2953512"/>
             <a:ext cx="2849270" cy="859536"/>
           </a:xfrm>
           <a:prstGeom prst="rect">
@@ -6557,7 +6557,7 @@
         </p:nvSpPr>
         <p:spPr>
           <a:xfrm>
-            <a:off x="5070348" y="3904488"/>
+            <a:off x="5069434" y="3904488"/>
             <a:ext cx="2849270" cy="0"/>
           </a:xfrm>
           <a:prstGeom prst="line">
@@ -6580,7 +6580,7 @@
         </p:nvSpPr>
         <p:spPr>
           <a:xfrm>
-            <a:off x="5070348" y="3995928"/>
+            <a:off x="5069434" y="3995928"/>
             <a:ext cx="2849270" cy="859536"/>
           </a:xfrm>
           <a:prstGeom prst="rect">
@@ -6642,8 +6642,8 @@
         </p:nvSpPr>
         <p:spPr>
           <a:xfrm>
-            <a:off x="8267090" y="1691640"/>
-            <a:ext cx="3418942" cy="4151376"/>
+            <a:off x="8266176" y="1691640"/>
+            <a:ext cx="3418027" cy="4169664"/>
           </a:xfrm>
           <a:prstGeom prst="roundRect">
             <a:avLst>
@@ -6664,8 +6664,8 @@
         </p:nvSpPr>
         <p:spPr>
           <a:xfrm>
-            <a:off x="8395106" y="1819656"/>
-            <a:ext cx="3162910" cy="457200"/>
+            <a:off x="8394192" y="1819656"/>
+            <a:ext cx="3161995" cy="457200"/>
           </a:xfrm>
           <a:prstGeom prst="rect">
             <a:avLst/>
@@ -6683,7 +6683,7 @@
             <a:r>
               <a:rPr lang="ja-JP" altLang="en-US" sz="2400" b="1" dirty="0">
                 <a:solidFill>
-                  <a:srgbClr val="D55E00"/>
+                  <a:srgbClr val="C00000"/>
                 </a:solidFill>
                 <a:latin typeface="メイリオ" pitchFamily="34" charset="0"/>
                 <a:ea typeface="メイリオ" pitchFamily="34" charset="-122"/>
@@ -6703,8 +6703,8 @@
         </p:nvSpPr>
         <p:spPr>
           <a:xfrm>
-            <a:off x="8395106" y="2350008"/>
-            <a:ext cx="3162910" cy="420624"/>
+            <a:off x="8394192" y="2350008"/>
+            <a:ext cx="3161995" cy="420624"/>
           </a:xfrm>
           <a:prstGeom prst="rect">
             <a:avLst/>
@@ -6725,7 +6725,7 @@
             <a:r>
               <a:rPr lang="ja-JP" altLang="en-US" sz="2200" b="1" dirty="0">
                 <a:solidFill>
-                  <a:srgbClr val="D55E00"/>
+                  <a:srgbClr val="C00000"/>
                 </a:solidFill>
                 <a:latin typeface="メイリオ" pitchFamily="34" charset="0"/>
                 <a:ea typeface="メイリオ" pitchFamily="34" charset="-122"/>
@@ -6745,8 +6745,8 @@
         </p:nvSpPr>
         <p:spPr>
           <a:xfrm>
-            <a:off x="8395106" y="2862072"/>
-            <a:ext cx="3162910" cy="0"/>
+            <a:off x="8394192" y="2862072"/>
+            <a:ext cx="3161995" cy="0"/>
           </a:xfrm>
           <a:prstGeom prst="line">
             <a:avLst/>
@@ -6768,8 +6768,8 @@
         </p:nvSpPr>
         <p:spPr>
           <a:xfrm>
-            <a:off x="8395106" y="2953512"/>
-            <a:ext cx="3162910" cy="859536"/>
+            <a:off x="8394192" y="2953512"/>
+            <a:ext cx="3161995" cy="859536"/>
           </a:xfrm>
           <a:prstGeom prst="rect">
             <a:avLst/>
@@ -6830,8 +6830,8 @@
         </p:nvSpPr>
         <p:spPr>
           <a:xfrm>
-            <a:off x="8395106" y="3904488"/>
-            <a:ext cx="3162910" cy="0"/>
+            <a:off x="8394192" y="3904488"/>
+            <a:ext cx="3161995" cy="0"/>
           </a:xfrm>
           <a:prstGeom prst="line">
             <a:avLst/>
@@ -6853,8 +6853,8 @@
         </p:nvSpPr>
         <p:spPr>
           <a:xfrm>
-            <a:off x="8395106" y="3995928"/>
-            <a:ext cx="3162910" cy="859536"/>
+            <a:off x="8394192" y="3995928"/>
+            <a:ext cx="3161995" cy="859536"/>
           </a:xfrm>
           <a:prstGeom prst="rect">
             <a:avLst/>
@@ -7016,7 +7016,7 @@
           </a:xfrm>
           <a:prstGeom prst="roundRect">
             <a:avLst>
-              <a:gd name="adj" fmla="val 15625"/>
+              <a:gd name="adj" fmla="val 7813"/>
             </a:avLst>
           </a:prstGeom>
           <a:solidFill>
@@ -7025,14 +7025,14 @@
           <a:ln/>
         </p:spPr>
         <p:txBody>
-          <a:bodyPr wrap="square" lIns="0" tIns="0" rIns="0" bIns="0" rtlCol="0" anchor="ctr"/>
+          <a:bodyPr wrap="none" lIns="0" tIns="0" rIns="0" bIns="0" rtlCol="0" anchor="ctr"/>
           <a:lstStyle/>
           <a:p>
             <a:pPr algn="ctr" indent="0" marL="0">
               <a:buNone/>
             </a:pPr>
             <a:r>
-              <a:rPr lang="ja-JP" altLang="en-US" sz="1100" dirty="0">
+              <a:rPr lang="ja-JP" altLang="en-US" sz="1050" dirty="0">
                 <a:solidFill>
                   <a:srgbClr val="404040"/>
                 </a:solidFill>
@@ -7042,14 +7042,14 @@
               </a:rPr>
               <a:t>4つの</a:t>
             </a:r>
-            <a:endParaRPr lang="ja-JP" sz="1100" dirty="0"/>
+            <a:endParaRPr lang="ja-JP" sz="1050" dirty="0"/>
           </a:p>
           <a:p>
             <a:pPr algn="ctr" indent="0" marL="0">
               <a:buNone/>
             </a:pPr>
             <a:r>
-              <a:rPr lang="ja-JP" altLang="en-US" sz="1100" dirty="0">
+              <a:rPr lang="ja-JP" altLang="en-US" sz="1050" dirty="0">
                 <a:solidFill>
                   <a:srgbClr val="404040"/>
                 </a:solidFill>
@@ -7059,7 +7059,7 @@
               </a:rPr>
               <a:t>要素</a:t>
             </a:r>
-            <a:endParaRPr lang="ja-JP" sz="1100" dirty="0"/>
+            <a:endParaRPr lang="ja-JP" sz="1050" dirty="0"/>
           </a:p>
         </p:txBody>
       </p:sp>
@@ -7076,7 +7076,7 @@
           </a:xfrm>
           <a:prstGeom prst="roundRect">
             <a:avLst>
-              <a:gd name="adj" fmla="val 15625"/>
+              <a:gd name="adj" fmla="val 7813"/>
             </a:avLst>
           </a:prstGeom>
           <a:solidFill>
@@ -7085,14 +7085,14 @@
           <a:ln/>
         </p:spPr>
         <p:txBody>
-          <a:bodyPr wrap="square" lIns="0" tIns="0" rIns="0" bIns="0" rtlCol="0" anchor="ctr"/>
+          <a:bodyPr wrap="none" lIns="0" tIns="0" rIns="0" bIns="0" rtlCol="0" anchor="ctr"/>
           <a:lstStyle/>
           <a:p>
             <a:pPr algn="ctr" indent="0" marL="0">
               <a:buNone/>
             </a:pPr>
             <a:r>
-              <a:rPr lang="ja-JP" altLang="en-US" sz="1100" dirty="0">
+              <a:rPr lang="ja-JP" altLang="en-US" sz="1050" dirty="0">
                 <a:solidFill>
                   <a:srgbClr val="404040"/>
                 </a:solidFill>
@@ -7102,14 +7102,14 @@
               </a:rPr>
               <a:t>フェニレ</a:t>
             </a:r>
-            <a:endParaRPr lang="ja-JP" sz="1100" dirty="0"/>
+            <a:endParaRPr lang="ja-JP" sz="1050" dirty="0"/>
           </a:p>
           <a:p>
             <a:pPr algn="ctr" indent="0" marL="0">
               <a:buNone/>
             </a:pPr>
             <a:r>
-              <a:rPr lang="ja-JP" altLang="en-US" sz="1100" dirty="0">
+              <a:rPr lang="ja-JP" altLang="en-US" sz="1050" dirty="0">
                 <a:solidFill>
                   <a:srgbClr val="404040"/>
                 </a:solidFill>
@@ -7119,7 +7119,7 @@
               </a:rPr>
               <a:t>フリン</a:t>
             </a:r>
-            <a:endParaRPr lang="ja-JP" sz="1100" dirty="0"/>
+            <a:endParaRPr lang="ja-JP" sz="1050" dirty="0"/>
           </a:p>
         </p:txBody>
       </p:sp>
@@ -7136,7 +7136,7 @@
           </a:xfrm>
           <a:prstGeom prst="roundRect">
             <a:avLst>
-              <a:gd name="adj" fmla="val 15625"/>
+              <a:gd name="adj" fmla="val 7813"/>
             </a:avLst>
           </a:prstGeom>
           <a:solidFill>
@@ -7145,14 +7145,14 @@
           <a:ln/>
         </p:spPr>
         <p:txBody>
-          <a:bodyPr wrap="square" lIns="0" tIns="0" rIns="0" bIns="0" rtlCol="0" anchor="ctr"/>
+          <a:bodyPr wrap="none" lIns="0" tIns="0" rIns="0" bIns="0" rtlCol="0" anchor="ctr"/>
           <a:lstStyle/>
           <a:p>
             <a:pPr algn="ctr" indent="0" marL="0">
               <a:buNone/>
             </a:pPr>
             <a:r>
-              <a:rPr lang="ja-JP" altLang="en-US" sz="1100" b="1" dirty="0">
+              <a:rPr lang="ja-JP" altLang="en-US" sz="1050" b="1" dirty="0">
                 <a:solidFill>
                   <a:srgbClr val="FFFFFF"/>
                 </a:solidFill>
@@ -7162,14 +7162,14 @@
               </a:rPr>
               <a:t>エフェ</a:t>
             </a:r>
-            <a:endParaRPr lang="ja-JP" sz="1100" dirty="0"/>
+            <a:endParaRPr lang="ja-JP" sz="1050" dirty="0"/>
           </a:p>
           <a:p>
             <a:pPr algn="ctr" indent="0" marL="0">
               <a:buNone/>
             </a:pPr>
             <a:r>
-              <a:rPr lang="ja-JP" altLang="en-US" sz="1100" b="1" dirty="0">
+              <a:rPr lang="ja-JP" altLang="en-US" sz="1050" b="1" dirty="0">
                 <a:solidFill>
                   <a:srgbClr val="FFFFFF"/>
                 </a:solidFill>
@@ -7179,7 +7179,7 @@
               </a:rPr>
               <a:t>ドリン</a:t>
             </a:r>
-            <a:endParaRPr lang="ja-JP" sz="1100" dirty="0"/>
+            <a:endParaRPr lang="ja-JP" sz="1050" dirty="0"/>
           </a:p>
         </p:txBody>
       </p:sp>
@@ -7196,7 +7196,7 @@
           </a:xfrm>
           <a:prstGeom prst="roundRect">
             <a:avLst>
-              <a:gd name="adj" fmla="val 15625"/>
+              <a:gd name="adj" fmla="val 7813"/>
             </a:avLst>
           </a:prstGeom>
           <a:solidFill>
@@ -7205,14 +7205,14 @@
           <a:ln/>
         </p:spPr>
         <p:txBody>
-          <a:bodyPr wrap="square" lIns="0" tIns="0" rIns="0" bIns="0" rtlCol="0" anchor="ctr"/>
+          <a:bodyPr wrap="none" lIns="0" tIns="0" rIns="0" bIns="0" rtlCol="0" anchor="ctr"/>
           <a:lstStyle/>
           <a:p>
             <a:pPr algn="ctr" indent="0" marL="0">
               <a:buNone/>
             </a:pPr>
             <a:r>
-              <a:rPr lang="ja-JP" altLang="en-US" sz="1100" dirty="0">
+              <a:rPr lang="ja-JP" altLang="en-US" sz="1050" dirty="0">
                 <a:solidFill>
                   <a:srgbClr val="404040"/>
                 </a:solidFill>
@@ -7222,14 +7222,14 @@
               </a:rPr>
               <a:t>ノルアド</a:t>
             </a:r>
-            <a:endParaRPr lang="ja-JP" sz="1100" dirty="0"/>
+            <a:endParaRPr lang="ja-JP" sz="1050" dirty="0"/>
           </a:p>
           <a:p>
             <a:pPr algn="ctr" indent="0" marL="0">
               <a:buNone/>
             </a:pPr>
             <a:r>
-              <a:rPr lang="ja-JP" altLang="en-US" sz="1100" dirty="0">
+              <a:rPr lang="ja-JP" altLang="en-US" sz="1050" dirty="0">
                 <a:solidFill>
                   <a:srgbClr val="404040"/>
                 </a:solidFill>
@@ -7239,7 +7239,7 @@
               </a:rPr>
               <a:t>レナリン</a:t>
             </a:r>
-            <a:endParaRPr lang="ja-JP" sz="1100" dirty="0"/>
+            <a:endParaRPr lang="ja-JP" sz="1050" dirty="0"/>
           </a:p>
         </p:txBody>
       </p:sp>
@@ -7256,7 +7256,7 @@
           </a:xfrm>
           <a:prstGeom prst="roundRect">
             <a:avLst>
-              <a:gd name="adj" fmla="val 15625"/>
+              <a:gd name="adj" fmla="val 7813"/>
             </a:avLst>
           </a:prstGeom>
           <a:solidFill>
@@ -7265,14 +7265,14 @@
           <a:ln/>
         </p:spPr>
         <p:txBody>
-          <a:bodyPr wrap="square" lIns="0" tIns="0" rIns="0" bIns="0" rtlCol="0" anchor="ctr"/>
+          <a:bodyPr wrap="none" lIns="0" tIns="0" rIns="0" bIns="0" rtlCol="0" anchor="ctr"/>
           <a:lstStyle/>
           <a:p>
             <a:pPr algn="ctr" indent="0" marL="0">
               <a:buNone/>
             </a:pPr>
             <a:r>
-              <a:rPr lang="ja-JP" altLang="en-US" sz="1100" dirty="0">
+              <a:rPr lang="ja-JP" altLang="en-US" sz="1050" dirty="0">
                 <a:solidFill>
                   <a:srgbClr val="404040"/>
                 </a:solidFill>
@@ -7282,7 +7282,7 @@
               </a:rPr>
               <a:t>使い分け</a:t>
             </a:r>
-            <a:endParaRPr lang="ja-JP" sz="1100" dirty="0"/>
+            <a:endParaRPr lang="ja-JP" sz="1050" dirty="0"/>
           </a:p>
         </p:txBody>
       </p:sp>
@@ -7390,11 +7390,11 @@
         <p:spPr>
           <a:xfrm>
             <a:off x="502920" y="1691640"/>
-            <a:ext cx="3689604" cy="4160520"/>
+            <a:ext cx="4219042" cy="4169664"/>
           </a:xfrm>
           <a:prstGeom prst="roundRect">
             <a:avLst>
-              <a:gd name="adj" fmla="val 1983"/>
+              <a:gd name="adj" fmla="val 1754"/>
             </a:avLst>
           </a:prstGeom>
           <a:solidFill>
@@ -7412,7 +7412,7 @@
         <p:spPr>
           <a:xfrm>
             <a:off x="630936" y="1819656"/>
-            <a:ext cx="3433572" cy="457200"/>
+            <a:ext cx="3963010" cy="457200"/>
           </a:xfrm>
           <a:prstGeom prst="rect">
             <a:avLst/>
@@ -7451,7 +7451,7 @@
         <p:spPr>
           <a:xfrm>
             <a:off x="630936" y="2350008"/>
-            <a:ext cx="3433572" cy="1289304"/>
+            <a:ext cx="3963010" cy="1289304"/>
           </a:xfrm>
           <a:prstGeom prst="rect">
             <a:avLst/>
@@ -7555,7 +7555,7 @@
         <p:spPr>
           <a:xfrm>
             <a:off x="630936" y="3730752"/>
-            <a:ext cx="3433572" cy="0"/>
+            <a:ext cx="3963010" cy="0"/>
           </a:xfrm>
           <a:prstGeom prst="line">
             <a:avLst/>
@@ -7578,7 +7578,7 @@
         <p:spPr>
           <a:xfrm>
             <a:off x="630936" y="3822192"/>
-            <a:ext cx="3433572" cy="1289304"/>
+            <a:ext cx="3963010" cy="1289304"/>
           </a:xfrm>
           <a:prstGeom prst="rect">
             <a:avLst/>
@@ -7605,7 +7605,29 @@
                 <a:ea typeface="メイリオ" pitchFamily="34" charset="-122"/>
                 <a:cs typeface="メイリオ" pitchFamily="34" charset="-120"/>
               </a:rPr>
-              <a:t>希釈（慣用）：</a:t>
+              <a:t>希釈</a:t>
+            </a:r>
+            <a:r>
+              <a:rPr lang="ja-JP" altLang="en-US" sz="2200" b="1" dirty="0">
+                <a:solidFill>
+                  <a:srgbClr val="D55E00"/>
+                </a:solidFill>
+                <a:latin typeface="メイリオ" pitchFamily="34" charset="0"/>
+                <a:ea typeface="メイリオ" pitchFamily="34" charset="-122"/>
+                <a:cs typeface="メイリオ" pitchFamily="34" charset="-120"/>
+              </a:rPr>
+              <a:t>（慣用）</a:t>
+            </a:r>
+            <a:r>
+              <a:rPr lang="ja-JP" altLang="en-US" sz="2200" dirty="0">
+                <a:solidFill>
+                  <a:srgbClr val="262626"/>
+                </a:solidFill>
+                <a:latin typeface="メイリオ" pitchFamily="34" charset="0"/>
+                <a:ea typeface="メイリオ" pitchFamily="34" charset="-122"/>
+                <a:cs typeface="メイリオ" pitchFamily="34" charset="-120"/>
+              </a:rPr>
+              <a:t>：</a:t>
             </a:r>
             <a:endParaRPr lang="ja-JP" sz="2200" dirty="0"/>
           </a:p>
@@ -7625,7 +7647,7 @@
                 <a:ea typeface="メイリオ" pitchFamily="34" charset="-122"/>
                 <a:cs typeface="メイリオ" pitchFamily="34" charset="-120"/>
               </a:rPr>
-              <a:t>40 mg/1 mL を 10 mL に</a:t>
+              <a:t>40 mg/1 mL を</a:t>
             </a:r>
             <a:endParaRPr lang="ja-JP" sz="2200" dirty="0"/>
           </a:p>
@@ -7645,7 +7667,7 @@
                 <a:ea typeface="メイリオ" pitchFamily="34" charset="-122"/>
                 <a:cs typeface="メイリオ" pitchFamily="34" charset="-120"/>
               </a:rPr>
-              <a:t>（4 mg/mL）</a:t>
+              <a:t>10 mL に（4 mg/mL）</a:t>
             </a:r>
             <a:endParaRPr lang="ja-JP" sz="2200" dirty="0"/>
           </a:p>
@@ -7660,7 +7682,7 @@
         <p:spPr>
           <a:xfrm>
             <a:off x="630936" y="5202936"/>
-            <a:ext cx="3433572" cy="0"/>
+            <a:ext cx="3963010" cy="0"/>
           </a:xfrm>
           <a:prstGeom prst="line">
             <a:avLst/>
@@ -7683,7 +7705,7 @@
         <p:spPr>
           <a:xfrm>
             <a:off x="630936" y="5294376"/>
-            <a:ext cx="3433572" cy="420624"/>
+            <a:ext cx="3963010" cy="420624"/>
           </a:xfrm>
           <a:prstGeom prst="rect">
             <a:avLst/>
@@ -7702,6 +7724,17 @@
               <a:buNone/>
             </a:pPr>
             <a:r>
+              <a:rPr lang="ja-JP" altLang="en-US" sz="2200" b="1" dirty="0">
+                <a:solidFill>
+                  <a:srgbClr val="0072B2"/>
+                </a:solidFill>
+                <a:latin typeface="メイリオ" pitchFamily="34" charset="0"/>
+                <a:ea typeface="メイリオ" pitchFamily="34" charset="-122"/>
+                <a:cs typeface="メイリオ" pitchFamily="34" charset="-120"/>
+              </a:rPr>
+              <a:t>1〜2 mL</a:t>
+            </a:r>
+            <a:r>
               <a:rPr lang="ja-JP" altLang="en-US" sz="2200" dirty="0">
                 <a:solidFill>
                   <a:srgbClr val="262626"/>
@@ -7710,7 +7743,7 @@
                 <a:ea typeface="メイリオ" pitchFamily="34" charset="-122"/>
                 <a:cs typeface="メイリオ" pitchFamily="34" charset="-120"/>
               </a:rPr>
-              <a:t>1〜2 mL ずつ</a:t>
+              <a:t> ずつ</a:t>
             </a:r>
             <a:endParaRPr lang="ja-JP" sz="2200" dirty="0"/>
           </a:p>
@@ -7724,12 +7757,12 @@
         </p:nvSpPr>
         <p:spPr>
           <a:xfrm>
-            <a:off x="4411980" y="1691640"/>
-            <a:ext cx="3526841" cy="4160520"/>
+            <a:off x="4941418" y="1691640"/>
+            <a:ext cx="3105302" cy="4169664"/>
           </a:xfrm>
           <a:prstGeom prst="roundRect">
             <a:avLst>
-              <a:gd name="adj" fmla="val 2074"/>
+              <a:gd name="adj" fmla="val 2356"/>
             </a:avLst>
           </a:prstGeom>
           <a:solidFill>
@@ -7746,8 +7779,8 @@
         </p:nvSpPr>
         <p:spPr>
           <a:xfrm>
-            <a:off x="4539996" y="1819656"/>
-            <a:ext cx="3270809" cy="457200"/>
+            <a:off x="5069434" y="1819656"/>
+            <a:ext cx="2849270" cy="457200"/>
           </a:xfrm>
           <a:prstGeom prst="rect">
             <a:avLst/>
@@ -7765,7 +7798,7 @@
             <a:r>
               <a:rPr lang="ja-JP" altLang="en-US" sz="2400" b="1" dirty="0">
                 <a:solidFill>
-                  <a:srgbClr val="00A8AA"/>
+                  <a:srgbClr val="0072B2"/>
                 </a:solidFill>
                 <a:latin typeface="メイリオ" pitchFamily="34" charset="0"/>
                 <a:ea typeface="メイリオ" pitchFamily="34" charset="-122"/>
@@ -7785,8 +7818,8 @@
         </p:nvSpPr>
         <p:spPr>
           <a:xfrm>
-            <a:off x="4539996" y="2350008"/>
-            <a:ext cx="3270809" cy="420624"/>
+            <a:off x="5069434" y="2350008"/>
+            <a:ext cx="2849270" cy="420624"/>
           </a:xfrm>
           <a:prstGeom prst="rect">
             <a:avLst/>
@@ -7827,8 +7860,8 @@
         </p:nvSpPr>
         <p:spPr>
           <a:xfrm>
-            <a:off x="4539996" y="2862072"/>
-            <a:ext cx="3270809" cy="0"/>
+            <a:off x="5069434" y="2862072"/>
+            <a:ext cx="2849270" cy="0"/>
           </a:xfrm>
           <a:prstGeom prst="line">
             <a:avLst/>
@@ -7850,8 +7883,8 @@
         </p:nvSpPr>
         <p:spPr>
           <a:xfrm>
-            <a:off x="4539996" y="2953512"/>
-            <a:ext cx="3270809" cy="859536"/>
+            <a:off x="5069434" y="2953512"/>
+            <a:ext cx="2849270" cy="859536"/>
           </a:xfrm>
           <a:prstGeom prst="rect">
             <a:avLst/>
@@ -7912,8 +7945,8 @@
         </p:nvSpPr>
         <p:spPr>
           <a:xfrm>
-            <a:off x="4539996" y="3904488"/>
-            <a:ext cx="3270809" cy="0"/>
+            <a:off x="5069434" y="3904488"/>
+            <a:ext cx="2849270" cy="0"/>
           </a:xfrm>
           <a:prstGeom prst="line">
             <a:avLst/>
@@ -7935,8 +7968,8 @@
         </p:nvSpPr>
         <p:spPr>
           <a:xfrm>
-            <a:off x="4539996" y="3995928"/>
-            <a:ext cx="3270809" cy="420624"/>
+            <a:off x="5069434" y="3995928"/>
+            <a:ext cx="2849270" cy="859536"/>
           </a:xfrm>
           <a:prstGeom prst="rect">
             <a:avLst/>
@@ -7963,7 +7996,27 @@
                 <a:ea typeface="メイリオ" pitchFamily="34" charset="-122"/>
                 <a:cs typeface="メイリオ" pitchFamily="34" charset="-120"/>
               </a:rPr>
-              <a:t>心拍数も上げたいとき</a:t>
+              <a:t>心拍数も</a:t>
+            </a:r>
+            <a:endParaRPr lang="ja-JP" sz="2200" dirty="0"/>
+          </a:p>
+          <a:p>
+            <a:pPr algn="l" indent="0" marL="0">
+              <a:spcAft>
+                <a:spcPts val="100"/>
+              </a:spcAft>
+              <a:buNone/>
+            </a:pPr>
+            <a:r>
+              <a:rPr lang="ja-JP" altLang="en-US" sz="2200" dirty="0">
+                <a:solidFill>
+                  <a:srgbClr val="262626"/>
+                </a:solidFill>
+                <a:latin typeface="メイリオ" pitchFamily="34" charset="0"/>
+                <a:ea typeface="メイリオ" pitchFamily="34" charset="-122"/>
+                <a:cs typeface="メイリオ" pitchFamily="34" charset="-120"/>
+              </a:rPr>
+              <a:t>上げたいとき</a:t>
             </a:r>
             <a:endParaRPr lang="ja-JP" sz="2200" dirty="0"/>
           </a:p>
@@ -7977,12 +8030,12 @@
         </p:nvSpPr>
         <p:spPr>
           <a:xfrm>
-            <a:off x="8159191" y="1691640"/>
-            <a:ext cx="3526841" cy="4160520"/>
+            <a:off x="8266176" y="1691640"/>
+            <a:ext cx="3418027" cy="4169664"/>
           </a:xfrm>
           <a:prstGeom prst="roundRect">
             <a:avLst>
-              <a:gd name="adj" fmla="val 2074"/>
+              <a:gd name="adj" fmla="val 2140"/>
             </a:avLst>
           </a:prstGeom>
           <a:solidFill>
@@ -7999,8 +8052,8 @@
         </p:nvSpPr>
         <p:spPr>
           <a:xfrm>
-            <a:off x="8287207" y="1819656"/>
-            <a:ext cx="3270809" cy="457200"/>
+            <a:off x="8394192" y="1819656"/>
+            <a:ext cx="3161995" cy="457200"/>
           </a:xfrm>
           <a:prstGeom prst="rect">
             <a:avLst/>
@@ -8018,7 +8071,7 @@
             <a:r>
               <a:rPr lang="ja-JP" altLang="en-US" sz="2400" b="1" dirty="0">
                 <a:solidFill>
-                  <a:srgbClr val="D55E00"/>
+                  <a:srgbClr val="C00000"/>
                 </a:solidFill>
                 <a:latin typeface="メイリオ" pitchFamily="34" charset="0"/>
                 <a:ea typeface="メイリオ" pitchFamily="34" charset="-122"/>
@@ -8038,8 +8091,8 @@
         </p:nvSpPr>
         <p:spPr>
           <a:xfrm>
-            <a:off x="8287207" y="2350008"/>
-            <a:ext cx="3270809" cy="1289304"/>
+            <a:off x="8394192" y="2350008"/>
+            <a:ext cx="3161995" cy="1289304"/>
           </a:xfrm>
           <a:prstGeom prst="rect">
             <a:avLst/>
@@ -8120,8 +8173,8 @@
         </p:nvSpPr>
         <p:spPr>
           <a:xfrm>
-            <a:off x="8287207" y="3730752"/>
-            <a:ext cx="3270809" cy="0"/>
+            <a:off x="8394192" y="3730752"/>
+            <a:ext cx="3161995" cy="0"/>
           </a:xfrm>
           <a:prstGeom prst="line">
             <a:avLst/>
@@ -8143,8 +8196,8 @@
         </p:nvSpPr>
         <p:spPr>
           <a:xfrm>
-            <a:off x="8287207" y="3822192"/>
-            <a:ext cx="3270809" cy="859536"/>
+            <a:off x="8394192" y="3822192"/>
+            <a:ext cx="3161995" cy="859536"/>
           </a:xfrm>
           <a:prstGeom prst="rect">
             <a:avLst/>
@@ -8205,8 +8258,8 @@
         </p:nvSpPr>
         <p:spPr>
           <a:xfrm>
-            <a:off x="8287207" y="4773168"/>
-            <a:ext cx="3270809" cy="0"/>
+            <a:off x="8394192" y="4773168"/>
+            <a:ext cx="3161995" cy="0"/>
           </a:xfrm>
           <a:prstGeom prst="line">
             <a:avLst/>
@@ -8228,8 +8281,8 @@
         </p:nvSpPr>
         <p:spPr>
           <a:xfrm>
-            <a:off x="8287207" y="4864608"/>
-            <a:ext cx="3270809" cy="859536"/>
+            <a:off x="8394192" y="4864608"/>
+            <a:ext cx="3161995" cy="859536"/>
           </a:xfrm>
           <a:prstGeom prst="rect">
             <a:avLst/>
@@ -8402,7 +8455,7 @@
           </a:xfrm>
           <a:prstGeom prst="roundRect">
             <a:avLst>
-              <a:gd name="adj" fmla="val 15625"/>
+              <a:gd name="adj" fmla="val 7813"/>
             </a:avLst>
           </a:prstGeom>
           <a:solidFill>
@@ -8411,14 +8464,14 @@
           <a:ln/>
         </p:spPr>
         <p:txBody>
-          <a:bodyPr wrap="square" lIns="0" tIns="0" rIns="0" bIns="0" rtlCol="0" anchor="ctr"/>
+          <a:bodyPr wrap="none" lIns="0" tIns="0" rIns="0" bIns="0" rtlCol="0" anchor="ctr"/>
           <a:lstStyle/>
           <a:p>
             <a:pPr algn="ctr" indent="0" marL="0">
               <a:buNone/>
             </a:pPr>
             <a:r>
-              <a:rPr lang="ja-JP" altLang="en-US" sz="1100" dirty="0">
+              <a:rPr lang="ja-JP" altLang="en-US" sz="1050" dirty="0">
                 <a:solidFill>
                   <a:srgbClr val="404040"/>
                 </a:solidFill>
@@ -8428,14 +8481,14 @@
               </a:rPr>
               <a:t>4つの</a:t>
             </a:r>
-            <a:endParaRPr lang="ja-JP" sz="1100" dirty="0"/>
+            <a:endParaRPr lang="ja-JP" sz="1050" dirty="0"/>
           </a:p>
           <a:p>
             <a:pPr algn="ctr" indent="0" marL="0">
               <a:buNone/>
             </a:pPr>
             <a:r>
-              <a:rPr lang="ja-JP" altLang="en-US" sz="1100" dirty="0">
+              <a:rPr lang="ja-JP" altLang="en-US" sz="1050" dirty="0">
                 <a:solidFill>
                   <a:srgbClr val="404040"/>
                 </a:solidFill>
@@ -8445,7 +8498,7 @@
               </a:rPr>
               <a:t>要素</a:t>
             </a:r>
-            <a:endParaRPr lang="ja-JP" sz="1100" dirty="0"/>
+            <a:endParaRPr lang="ja-JP" sz="1050" dirty="0"/>
           </a:p>
         </p:txBody>
       </p:sp>
@@ -8462,7 +8515,7 @@
           </a:xfrm>
           <a:prstGeom prst="roundRect">
             <a:avLst>
-              <a:gd name="adj" fmla="val 15625"/>
+              <a:gd name="adj" fmla="val 7813"/>
             </a:avLst>
           </a:prstGeom>
           <a:solidFill>
@@ -8471,14 +8524,14 @@
           <a:ln/>
         </p:spPr>
         <p:txBody>
-          <a:bodyPr wrap="square" lIns="0" tIns="0" rIns="0" bIns="0" rtlCol="0" anchor="ctr"/>
+          <a:bodyPr wrap="none" lIns="0" tIns="0" rIns="0" bIns="0" rtlCol="0" anchor="ctr"/>
           <a:lstStyle/>
           <a:p>
             <a:pPr algn="ctr" indent="0" marL="0">
               <a:buNone/>
             </a:pPr>
             <a:r>
-              <a:rPr lang="ja-JP" altLang="en-US" sz="1100" dirty="0">
+              <a:rPr lang="ja-JP" altLang="en-US" sz="1050" dirty="0">
                 <a:solidFill>
                   <a:srgbClr val="404040"/>
                 </a:solidFill>
@@ -8488,14 +8541,14 @@
               </a:rPr>
               <a:t>フェニレ</a:t>
             </a:r>
-            <a:endParaRPr lang="ja-JP" sz="1100" dirty="0"/>
+            <a:endParaRPr lang="ja-JP" sz="1050" dirty="0"/>
           </a:p>
           <a:p>
             <a:pPr algn="ctr" indent="0" marL="0">
               <a:buNone/>
             </a:pPr>
             <a:r>
-              <a:rPr lang="ja-JP" altLang="en-US" sz="1100" dirty="0">
+              <a:rPr lang="ja-JP" altLang="en-US" sz="1050" dirty="0">
                 <a:solidFill>
                   <a:srgbClr val="404040"/>
                 </a:solidFill>
@@ -8505,7 +8558,7 @@
               </a:rPr>
               <a:t>フリン</a:t>
             </a:r>
-            <a:endParaRPr lang="ja-JP" sz="1100" dirty="0"/>
+            <a:endParaRPr lang="ja-JP" sz="1050" dirty="0"/>
           </a:p>
         </p:txBody>
       </p:sp>
@@ -8522,7 +8575,7 @@
           </a:xfrm>
           <a:prstGeom prst="roundRect">
             <a:avLst>
-              <a:gd name="adj" fmla="val 15625"/>
+              <a:gd name="adj" fmla="val 7813"/>
             </a:avLst>
           </a:prstGeom>
           <a:solidFill>
@@ -8531,14 +8584,14 @@
           <a:ln/>
         </p:spPr>
         <p:txBody>
-          <a:bodyPr wrap="square" lIns="0" tIns="0" rIns="0" bIns="0" rtlCol="0" anchor="ctr"/>
+          <a:bodyPr wrap="none" lIns="0" tIns="0" rIns="0" bIns="0" rtlCol="0" anchor="ctr"/>
           <a:lstStyle/>
           <a:p>
             <a:pPr algn="ctr" indent="0" marL="0">
               <a:buNone/>
             </a:pPr>
             <a:r>
-              <a:rPr lang="ja-JP" altLang="en-US" sz="1100" dirty="0">
+              <a:rPr lang="ja-JP" altLang="en-US" sz="1050" dirty="0">
                 <a:solidFill>
                   <a:srgbClr val="404040"/>
                 </a:solidFill>
@@ -8548,14 +8601,14 @@
               </a:rPr>
               <a:t>エフェ</a:t>
             </a:r>
-            <a:endParaRPr lang="ja-JP" sz="1100" dirty="0"/>
+            <a:endParaRPr lang="ja-JP" sz="1050" dirty="0"/>
           </a:p>
           <a:p>
             <a:pPr algn="ctr" indent="0" marL="0">
               <a:buNone/>
             </a:pPr>
             <a:r>
-              <a:rPr lang="ja-JP" altLang="en-US" sz="1100" dirty="0">
+              <a:rPr lang="ja-JP" altLang="en-US" sz="1050" dirty="0">
                 <a:solidFill>
                   <a:srgbClr val="404040"/>
                 </a:solidFill>
@@ -8565,7 +8618,7 @@
               </a:rPr>
               <a:t>ドリン</a:t>
             </a:r>
-            <a:endParaRPr lang="ja-JP" sz="1100" dirty="0"/>
+            <a:endParaRPr lang="ja-JP" sz="1050" dirty="0"/>
           </a:p>
         </p:txBody>
       </p:sp>
@@ -8582,7 +8635,7 @@
           </a:xfrm>
           <a:prstGeom prst="roundRect">
             <a:avLst>
-              <a:gd name="adj" fmla="val 15625"/>
+              <a:gd name="adj" fmla="val 7813"/>
             </a:avLst>
           </a:prstGeom>
           <a:solidFill>
@@ -8591,14 +8644,14 @@
           <a:ln/>
         </p:spPr>
         <p:txBody>
-          <a:bodyPr wrap="square" lIns="0" tIns="0" rIns="0" bIns="0" rtlCol="0" anchor="ctr"/>
+          <a:bodyPr wrap="none" lIns="0" tIns="0" rIns="0" bIns="0" rtlCol="0" anchor="ctr"/>
           <a:lstStyle/>
           <a:p>
             <a:pPr algn="ctr" indent="0" marL="0">
               <a:buNone/>
             </a:pPr>
             <a:r>
-              <a:rPr lang="ja-JP" altLang="en-US" sz="1100" b="1" dirty="0">
+              <a:rPr lang="ja-JP" altLang="en-US" sz="1050" b="1" dirty="0">
                 <a:solidFill>
                   <a:srgbClr val="FFFFFF"/>
                 </a:solidFill>
@@ -8608,14 +8661,14 @@
               </a:rPr>
               <a:t>ノルアド</a:t>
             </a:r>
-            <a:endParaRPr lang="ja-JP" sz="1100" dirty="0"/>
+            <a:endParaRPr lang="ja-JP" sz="1050" dirty="0"/>
           </a:p>
           <a:p>
             <a:pPr algn="ctr" indent="0" marL="0">
               <a:buNone/>
             </a:pPr>
             <a:r>
-              <a:rPr lang="ja-JP" altLang="en-US" sz="1100" b="1" dirty="0">
+              <a:rPr lang="ja-JP" altLang="en-US" sz="1050" b="1" dirty="0">
                 <a:solidFill>
                   <a:srgbClr val="FFFFFF"/>
                 </a:solidFill>
@@ -8625,7 +8678,7 @@
               </a:rPr>
               <a:t>レナリン</a:t>
             </a:r>
-            <a:endParaRPr lang="ja-JP" sz="1100" dirty="0"/>
+            <a:endParaRPr lang="ja-JP" sz="1050" dirty="0"/>
           </a:p>
         </p:txBody>
       </p:sp>
@@ -8642,7 +8695,7 @@
           </a:xfrm>
           <a:prstGeom prst="roundRect">
             <a:avLst>
-              <a:gd name="adj" fmla="val 15625"/>
+              <a:gd name="adj" fmla="val 7813"/>
             </a:avLst>
           </a:prstGeom>
           <a:solidFill>
@@ -8651,14 +8704,14 @@
           <a:ln/>
         </p:spPr>
         <p:txBody>
-          <a:bodyPr wrap="square" lIns="0" tIns="0" rIns="0" bIns="0" rtlCol="0" anchor="ctr"/>
+          <a:bodyPr wrap="none" lIns="0" tIns="0" rIns="0" bIns="0" rtlCol="0" anchor="ctr"/>
           <a:lstStyle/>
           <a:p>
             <a:pPr algn="ctr" indent="0" marL="0">
               <a:buNone/>
             </a:pPr>
             <a:r>
-              <a:rPr lang="ja-JP" altLang="en-US" sz="1100" dirty="0">
+              <a:rPr lang="ja-JP" altLang="en-US" sz="1050" dirty="0">
                 <a:solidFill>
                   <a:srgbClr val="404040"/>
                 </a:solidFill>
@@ -8668,7 +8721,7 @@
               </a:rPr>
               <a:t>使い分け</a:t>
             </a:r>
-            <a:endParaRPr lang="ja-JP" sz="1100" dirty="0"/>
+            <a:endParaRPr lang="ja-JP" sz="1050" dirty="0"/>
           </a:p>
         </p:txBody>
       </p:sp>
@@ -8776,11 +8829,11 @@
         <p:spPr>
           <a:xfrm>
             <a:off x="502920" y="1691640"/>
-            <a:ext cx="4090111" cy="4169664"/>
+            <a:ext cx="4219042" cy="4169664"/>
           </a:xfrm>
           <a:prstGeom prst="roundRect">
             <a:avLst>
-              <a:gd name="adj" fmla="val 1789"/>
+              <a:gd name="adj" fmla="val 1754"/>
             </a:avLst>
           </a:prstGeom>
           <a:solidFill>
@@ -8798,7 +8851,7 @@
         <p:spPr>
           <a:xfrm>
             <a:off x="630936" y="1819656"/>
-            <a:ext cx="3834079" cy="457200"/>
+            <a:ext cx="3963010" cy="457200"/>
           </a:xfrm>
           <a:prstGeom prst="rect">
             <a:avLst/>
@@ -8837,7 +8890,7 @@
         <p:spPr>
           <a:xfrm>
             <a:off x="630936" y="2350008"/>
-            <a:ext cx="3834079" cy="859536"/>
+            <a:ext cx="3963010" cy="859536"/>
           </a:xfrm>
           <a:prstGeom prst="rect">
             <a:avLst/>
@@ -8876,9 +8929,9 @@
               <a:buNone/>
             </a:pPr>
             <a:r>
-              <a:rPr lang="ja-JP" altLang="en-US" sz="2200" dirty="0">
-                <a:solidFill>
-                  <a:srgbClr val="262626"/>
+              <a:rPr lang="ja-JP" altLang="en-US" sz="2200" b="1" dirty="0">
+                <a:solidFill>
+                  <a:srgbClr val="0072B2"/>
                 </a:solidFill>
                 <a:latin typeface="メイリオ" pitchFamily="34" charset="0"/>
                 <a:ea typeface="メイリオ" pitchFamily="34" charset="-122"/>
@@ -8899,7 +8952,7 @@
         <p:spPr>
           <a:xfrm>
             <a:off x="630936" y="3300984"/>
-            <a:ext cx="3834079" cy="0"/>
+            <a:ext cx="3963010" cy="0"/>
           </a:xfrm>
           <a:prstGeom prst="line">
             <a:avLst/>
@@ -8922,7 +8975,7 @@
         <p:spPr>
           <a:xfrm>
             <a:off x="630936" y="3392424"/>
-            <a:ext cx="3834079" cy="859536"/>
+            <a:ext cx="3963010" cy="859536"/>
           </a:xfrm>
           <a:prstGeom prst="rect">
             <a:avLst/>
@@ -9006,7 +9059,7 @@
         <p:spPr>
           <a:xfrm>
             <a:off x="630936" y="4343400"/>
-            <a:ext cx="3834079" cy="0"/>
+            <a:ext cx="3963010" cy="0"/>
           </a:xfrm>
           <a:prstGeom prst="line">
             <a:avLst/>
@@ -9029,7 +9082,7 @@
         <p:spPr>
           <a:xfrm>
             <a:off x="630936" y="4434840"/>
-            <a:ext cx="3834079" cy="1289304"/>
+            <a:ext cx="3963010" cy="1289304"/>
           </a:xfrm>
           <a:prstGeom prst="rect">
             <a:avLst/>
@@ -9110,12 +9163,12 @@
         </p:nvSpPr>
         <p:spPr>
           <a:xfrm>
-            <a:off x="4812487" y="1691640"/>
-            <a:ext cx="3170225" cy="4169664"/>
+            <a:off x="4941418" y="1691640"/>
+            <a:ext cx="3105302" cy="4169664"/>
           </a:xfrm>
           <a:prstGeom prst="roundRect">
             <a:avLst>
-              <a:gd name="adj" fmla="val 2307"/>
+              <a:gd name="adj" fmla="val 2356"/>
             </a:avLst>
           </a:prstGeom>
           <a:solidFill>
@@ -9132,8 +9185,8 @@
         </p:nvSpPr>
         <p:spPr>
           <a:xfrm>
-            <a:off x="4940503" y="1819656"/>
-            <a:ext cx="2914193" cy="457200"/>
+            <a:off x="5069434" y="1819656"/>
+            <a:ext cx="2849270" cy="457200"/>
           </a:xfrm>
           <a:prstGeom prst="rect">
             <a:avLst/>
@@ -9151,7 +9204,7 @@
             <a:r>
               <a:rPr lang="ja-JP" altLang="en-US" sz="2400" b="1" dirty="0">
                 <a:solidFill>
-                  <a:srgbClr val="00A8AA"/>
+                  <a:srgbClr val="0072B2"/>
                 </a:solidFill>
                 <a:latin typeface="メイリオ" pitchFamily="34" charset="0"/>
                 <a:ea typeface="メイリオ" pitchFamily="34" charset="-122"/>
@@ -9171,8 +9224,8 @@
         </p:nvSpPr>
         <p:spPr>
           <a:xfrm>
-            <a:off x="4940503" y="2350008"/>
-            <a:ext cx="2914193" cy="1289304"/>
+            <a:off x="5069434" y="2350008"/>
+            <a:ext cx="2849270" cy="1289304"/>
           </a:xfrm>
           <a:prstGeom prst="rect">
             <a:avLst/>
@@ -9253,8 +9306,8 @@
         </p:nvSpPr>
         <p:spPr>
           <a:xfrm>
-            <a:off x="4940503" y="3730752"/>
-            <a:ext cx="2914193" cy="0"/>
+            <a:off x="5069434" y="3730752"/>
+            <a:ext cx="2849270" cy="0"/>
           </a:xfrm>
           <a:prstGeom prst="line">
             <a:avLst/>
@@ -9276,8 +9329,8 @@
         </p:nvSpPr>
         <p:spPr>
           <a:xfrm>
-            <a:off x="4940503" y="3822192"/>
-            <a:ext cx="2914193" cy="859536"/>
+            <a:off x="5069434" y="3822192"/>
+            <a:ext cx="2849270" cy="859536"/>
           </a:xfrm>
           <a:prstGeom prst="rect">
             <a:avLst/>
@@ -9338,8 +9391,8 @@
         </p:nvSpPr>
         <p:spPr>
           <a:xfrm>
-            <a:off x="4940503" y="4773168"/>
-            <a:ext cx="2914193" cy="0"/>
+            <a:off x="5069434" y="4773168"/>
+            <a:ext cx="2849270" cy="0"/>
           </a:xfrm>
           <a:prstGeom prst="line">
             <a:avLst/>
@@ -9361,8 +9414,8 @@
         </p:nvSpPr>
         <p:spPr>
           <a:xfrm>
-            <a:off x="4940503" y="4864608"/>
-            <a:ext cx="2914193" cy="859536"/>
+            <a:off x="5069434" y="4864608"/>
+            <a:ext cx="2849270" cy="859536"/>
           </a:xfrm>
           <a:prstGeom prst="rect">
             <a:avLst/>
@@ -9423,12 +9476,12 @@
         </p:nvSpPr>
         <p:spPr>
           <a:xfrm>
-            <a:off x="8203082" y="1691640"/>
-            <a:ext cx="3482950" cy="4169664"/>
+            <a:off x="8266176" y="1691640"/>
+            <a:ext cx="3418027" cy="4169664"/>
           </a:xfrm>
           <a:prstGeom prst="roundRect">
             <a:avLst>
-              <a:gd name="adj" fmla="val 2100"/>
+              <a:gd name="adj" fmla="val 2140"/>
             </a:avLst>
           </a:prstGeom>
           <a:solidFill>
@@ -9445,8 +9498,8 @@
         </p:nvSpPr>
         <p:spPr>
           <a:xfrm>
-            <a:off x="8331098" y="1819656"/>
-            <a:ext cx="3226918" cy="457200"/>
+            <a:off x="8394192" y="1819656"/>
+            <a:ext cx="3161995" cy="457200"/>
           </a:xfrm>
           <a:prstGeom prst="rect">
             <a:avLst/>
@@ -9464,7 +9517,7 @@
             <a:r>
               <a:rPr lang="ja-JP" altLang="en-US" sz="2400" b="1" dirty="0">
                 <a:solidFill>
-                  <a:srgbClr val="D55E00"/>
+                  <a:srgbClr val="C00000"/>
                 </a:solidFill>
                 <a:latin typeface="メイリオ" pitchFamily="34" charset="0"/>
                 <a:ea typeface="メイリオ" pitchFamily="34" charset="-122"/>
@@ -9484,8 +9537,8 @@
         </p:nvSpPr>
         <p:spPr>
           <a:xfrm>
-            <a:off x="8331098" y="2350008"/>
-            <a:ext cx="3226918" cy="1289304"/>
+            <a:off x="8394192" y="2350008"/>
+            <a:ext cx="3161995" cy="1289304"/>
           </a:xfrm>
           <a:prstGeom prst="rect">
             <a:avLst/>
@@ -9514,17 +9567,6 @@
               </a:rPr>
               <a:t>血管外漏出</a:t>
             </a:r>
-            <a:r>
-              <a:rPr lang="ja-JP" altLang="en-US" sz="2200" dirty="0">
-                <a:solidFill>
-                  <a:srgbClr val="262626"/>
-                </a:solidFill>
-                <a:latin typeface="メイリオ" pitchFamily="34" charset="0"/>
-                <a:ea typeface="メイリオ" pitchFamily="34" charset="-122"/>
-                <a:cs typeface="メイリオ" pitchFamily="34" charset="-120"/>
-              </a:rPr>
-              <a:t>（末梢なら</a:t>
-            </a:r>
             <a:endParaRPr lang="ja-JP" sz="2200" dirty="0"/>
           </a:p>
           <a:p>
@@ -9543,7 +9585,7 @@
                 <a:ea typeface="メイリオ" pitchFamily="34" charset="-122"/>
                 <a:cs typeface="メイリオ" pitchFamily="34" charset="-120"/>
               </a:rPr>
-              <a:t>太い近位の静脈・</a:t>
+              <a:t>（末梢なら太い近位の</a:t>
             </a:r>
             <a:endParaRPr lang="ja-JP" sz="2200" dirty="0"/>
           </a:p>
@@ -9563,7 +9605,7 @@
                 <a:ea typeface="メイリオ" pitchFamily="34" charset="-122"/>
                 <a:cs typeface="メイリオ" pitchFamily="34" charset="-120"/>
               </a:rPr>
-              <a:t>短時間・観察）</a:t>
+              <a:t>静脈・短時間・観察）</a:t>
             </a:r>
             <a:endParaRPr lang="ja-JP" sz="2200" dirty="0"/>
           </a:p>
@@ -9577,8 +9619,8 @@
         </p:nvSpPr>
         <p:spPr>
           <a:xfrm>
-            <a:off x="8331098" y="3730752"/>
-            <a:ext cx="3226918" cy="0"/>
+            <a:off x="8394192" y="3730752"/>
+            <a:ext cx="3161995" cy="0"/>
           </a:xfrm>
           <a:prstGeom prst="line">
             <a:avLst/>
@@ -9600,8 +9642,8 @@
         </p:nvSpPr>
         <p:spPr>
           <a:xfrm>
-            <a:off x="8331098" y="3822192"/>
-            <a:ext cx="3226918" cy="859536"/>
+            <a:off x="8394192" y="3822192"/>
+            <a:ext cx="3161995" cy="859536"/>
           </a:xfrm>
           <a:prstGeom prst="rect">
             <a:avLst/>
@@ -9662,8 +9704,8 @@
         </p:nvSpPr>
         <p:spPr>
           <a:xfrm>
-            <a:off x="8331098" y="4773168"/>
-            <a:ext cx="3226918" cy="0"/>
+            <a:off x="8394192" y="4773168"/>
+            <a:ext cx="3161995" cy="0"/>
           </a:xfrm>
           <a:prstGeom prst="line">
             <a:avLst/>
@@ -9685,8 +9727,8 @@
         </p:nvSpPr>
         <p:spPr>
           <a:xfrm>
-            <a:off x="8331098" y="4864608"/>
-            <a:ext cx="3226918" cy="859536"/>
+            <a:off x="8394192" y="4864608"/>
+            <a:ext cx="3161995" cy="859536"/>
           </a:xfrm>
           <a:prstGeom prst="rect">
             <a:avLst/>
@@ -9848,7 +9890,7 @@
           </a:xfrm>
           <a:prstGeom prst="roundRect">
             <a:avLst>
-              <a:gd name="adj" fmla="val 15625"/>
+              <a:gd name="adj" fmla="val 7813"/>
             </a:avLst>
           </a:prstGeom>
           <a:solidFill>
@@ -9857,14 +9899,14 @@
           <a:ln/>
         </p:spPr>
         <p:txBody>
-          <a:bodyPr wrap="square" lIns="0" tIns="0" rIns="0" bIns="0" rtlCol="0" anchor="ctr"/>
+          <a:bodyPr wrap="none" lIns="0" tIns="0" rIns="0" bIns="0" rtlCol="0" anchor="ctr"/>
           <a:lstStyle/>
           <a:p>
             <a:pPr algn="ctr" indent="0" marL="0">
               <a:buNone/>
             </a:pPr>
             <a:r>
-              <a:rPr lang="ja-JP" altLang="en-US" sz="1100" dirty="0">
+              <a:rPr lang="ja-JP" altLang="en-US" sz="1050" dirty="0">
                 <a:solidFill>
                   <a:srgbClr val="404040"/>
                 </a:solidFill>
@@ -9874,14 +9916,14 @@
               </a:rPr>
               <a:t>4つの</a:t>
             </a:r>
-            <a:endParaRPr lang="ja-JP" sz="1100" dirty="0"/>
+            <a:endParaRPr lang="ja-JP" sz="1050" dirty="0"/>
           </a:p>
           <a:p>
             <a:pPr algn="ctr" indent="0" marL="0">
               <a:buNone/>
             </a:pPr>
             <a:r>
-              <a:rPr lang="ja-JP" altLang="en-US" sz="1100" dirty="0">
+              <a:rPr lang="ja-JP" altLang="en-US" sz="1050" dirty="0">
                 <a:solidFill>
                   <a:srgbClr val="404040"/>
                 </a:solidFill>
@@ -9891,7 +9933,7 @@
               </a:rPr>
               <a:t>要素</a:t>
             </a:r>
-            <a:endParaRPr lang="ja-JP" sz="1100" dirty="0"/>
+            <a:endParaRPr lang="ja-JP" sz="1050" dirty="0"/>
           </a:p>
         </p:txBody>
       </p:sp>
@@ -9908,7 +9950,7 @@
           </a:xfrm>
           <a:prstGeom prst="roundRect">
             <a:avLst>
-              <a:gd name="adj" fmla="val 15625"/>
+              <a:gd name="adj" fmla="val 7813"/>
             </a:avLst>
           </a:prstGeom>
           <a:solidFill>
@@ -9917,14 +9959,14 @@
           <a:ln/>
         </p:spPr>
         <p:txBody>
-          <a:bodyPr wrap="square" lIns="0" tIns="0" rIns="0" bIns="0" rtlCol="0" anchor="ctr"/>
+          <a:bodyPr wrap="none" lIns="0" tIns="0" rIns="0" bIns="0" rtlCol="0" anchor="ctr"/>
           <a:lstStyle/>
           <a:p>
             <a:pPr algn="ctr" indent="0" marL="0">
               <a:buNone/>
             </a:pPr>
             <a:r>
-              <a:rPr lang="ja-JP" altLang="en-US" sz="1100" dirty="0">
+              <a:rPr lang="ja-JP" altLang="en-US" sz="1050" dirty="0">
                 <a:solidFill>
                   <a:srgbClr val="404040"/>
                 </a:solidFill>
@@ -9934,14 +9976,14 @@
               </a:rPr>
               <a:t>フェニレ</a:t>
             </a:r>
-            <a:endParaRPr lang="ja-JP" sz="1100" dirty="0"/>
+            <a:endParaRPr lang="ja-JP" sz="1050" dirty="0"/>
           </a:p>
           <a:p>
             <a:pPr algn="ctr" indent="0" marL="0">
               <a:buNone/>
             </a:pPr>
             <a:r>
-              <a:rPr lang="ja-JP" altLang="en-US" sz="1100" dirty="0">
+              <a:rPr lang="ja-JP" altLang="en-US" sz="1050" dirty="0">
                 <a:solidFill>
                   <a:srgbClr val="404040"/>
                 </a:solidFill>
@@ -9951,7 +9993,7 @@
               </a:rPr>
               <a:t>フリン</a:t>
             </a:r>
-            <a:endParaRPr lang="ja-JP" sz="1100" dirty="0"/>
+            <a:endParaRPr lang="ja-JP" sz="1050" dirty="0"/>
           </a:p>
         </p:txBody>
       </p:sp>
@@ -9968,7 +10010,7 @@
           </a:xfrm>
           <a:prstGeom prst="roundRect">
             <a:avLst>
-              <a:gd name="adj" fmla="val 15625"/>
+              <a:gd name="adj" fmla="val 7813"/>
             </a:avLst>
           </a:prstGeom>
           <a:solidFill>
@@ -9977,14 +10019,14 @@
           <a:ln/>
         </p:spPr>
         <p:txBody>
-          <a:bodyPr wrap="square" lIns="0" tIns="0" rIns="0" bIns="0" rtlCol="0" anchor="ctr"/>
+          <a:bodyPr wrap="none" lIns="0" tIns="0" rIns="0" bIns="0" rtlCol="0" anchor="ctr"/>
           <a:lstStyle/>
           <a:p>
             <a:pPr algn="ctr" indent="0" marL="0">
               <a:buNone/>
             </a:pPr>
             <a:r>
-              <a:rPr lang="ja-JP" altLang="en-US" sz="1100" dirty="0">
+              <a:rPr lang="ja-JP" altLang="en-US" sz="1050" dirty="0">
                 <a:solidFill>
                   <a:srgbClr val="404040"/>
                 </a:solidFill>
@@ -9994,14 +10036,14 @@
               </a:rPr>
               <a:t>エフェ</a:t>
             </a:r>
-            <a:endParaRPr lang="ja-JP" sz="1100" dirty="0"/>
+            <a:endParaRPr lang="ja-JP" sz="1050" dirty="0"/>
           </a:p>
           <a:p>
             <a:pPr algn="ctr" indent="0" marL="0">
               <a:buNone/>
             </a:pPr>
             <a:r>
-              <a:rPr lang="ja-JP" altLang="en-US" sz="1100" dirty="0">
+              <a:rPr lang="ja-JP" altLang="en-US" sz="1050" dirty="0">
                 <a:solidFill>
                   <a:srgbClr val="404040"/>
                 </a:solidFill>
@@ -10011,7 +10053,7 @@
               </a:rPr>
               <a:t>ドリン</a:t>
             </a:r>
-            <a:endParaRPr lang="ja-JP" sz="1100" dirty="0"/>
+            <a:endParaRPr lang="ja-JP" sz="1050" dirty="0"/>
           </a:p>
         </p:txBody>
       </p:sp>
@@ -10028,7 +10070,7 @@
           </a:xfrm>
           <a:prstGeom prst="roundRect">
             <a:avLst>
-              <a:gd name="adj" fmla="val 15625"/>
+              <a:gd name="adj" fmla="val 7813"/>
             </a:avLst>
           </a:prstGeom>
           <a:solidFill>
@@ -10037,14 +10079,14 @@
           <a:ln/>
         </p:spPr>
         <p:txBody>
-          <a:bodyPr wrap="square" lIns="0" tIns="0" rIns="0" bIns="0" rtlCol="0" anchor="ctr"/>
+          <a:bodyPr wrap="none" lIns="0" tIns="0" rIns="0" bIns="0" rtlCol="0" anchor="ctr"/>
           <a:lstStyle/>
           <a:p>
             <a:pPr algn="ctr" indent="0" marL="0">
               <a:buNone/>
             </a:pPr>
             <a:r>
-              <a:rPr lang="ja-JP" altLang="en-US" sz="1100" dirty="0">
+              <a:rPr lang="ja-JP" altLang="en-US" sz="1050" dirty="0">
                 <a:solidFill>
                   <a:srgbClr val="404040"/>
                 </a:solidFill>
@@ -10054,14 +10096,14 @@
               </a:rPr>
               <a:t>ノルアド</a:t>
             </a:r>
-            <a:endParaRPr lang="ja-JP" sz="1100" dirty="0"/>
+            <a:endParaRPr lang="ja-JP" sz="1050" dirty="0"/>
           </a:p>
           <a:p>
             <a:pPr algn="ctr" indent="0" marL="0">
               <a:buNone/>
             </a:pPr>
             <a:r>
-              <a:rPr lang="ja-JP" altLang="en-US" sz="1100" dirty="0">
+              <a:rPr lang="ja-JP" altLang="en-US" sz="1050" dirty="0">
                 <a:solidFill>
                   <a:srgbClr val="404040"/>
                 </a:solidFill>
@@ -10071,7 +10113,7 @@
               </a:rPr>
               <a:t>レナリン</a:t>
             </a:r>
-            <a:endParaRPr lang="ja-JP" sz="1100" dirty="0"/>
+            <a:endParaRPr lang="ja-JP" sz="1050" dirty="0"/>
           </a:p>
         </p:txBody>
       </p:sp>
@@ -10088,7 +10130,7 @@
           </a:xfrm>
           <a:prstGeom prst="roundRect">
             <a:avLst>
-              <a:gd name="adj" fmla="val 15625"/>
+              <a:gd name="adj" fmla="val 7813"/>
             </a:avLst>
           </a:prstGeom>
           <a:solidFill>
@@ -10097,14 +10139,14 @@
           <a:ln/>
         </p:spPr>
         <p:txBody>
-          <a:bodyPr wrap="square" lIns="0" tIns="0" rIns="0" bIns="0" rtlCol="0" anchor="ctr"/>
+          <a:bodyPr wrap="none" lIns="0" tIns="0" rIns="0" bIns="0" rtlCol="0" anchor="ctr"/>
           <a:lstStyle/>
           <a:p>
             <a:pPr algn="ctr" indent="0" marL="0">
               <a:buNone/>
             </a:pPr>
             <a:r>
-              <a:rPr lang="ja-JP" altLang="en-US" sz="1100" b="1" dirty="0">
+              <a:rPr lang="ja-JP" altLang="en-US" sz="1050" b="1" dirty="0">
                 <a:solidFill>
                   <a:srgbClr val="FFFFFF"/>
                 </a:solidFill>
@@ -10114,7 +10156,7 @@
               </a:rPr>
               <a:t>使い分け</a:t>
             </a:r>
-            <a:endParaRPr lang="ja-JP" sz="1100" dirty="0"/>
+            <a:endParaRPr lang="ja-JP" sz="1050" dirty="0"/>
           </a:p>
         </p:txBody>
       </p:sp>
@@ -11639,7 +11681,7 @@
           </a:xfrm>
           <a:prstGeom prst="roundRect">
             <a:avLst>
-              <a:gd name="adj" fmla="val 15625"/>
+              <a:gd name="adj" fmla="val 7813"/>
             </a:avLst>
           </a:prstGeom>
           <a:solidFill>
@@ -11648,14 +11690,14 @@
           <a:ln/>
         </p:spPr>
         <p:txBody>
-          <a:bodyPr wrap="square" lIns="0" tIns="0" rIns="0" bIns="0" rtlCol="0" anchor="ctr"/>
+          <a:bodyPr wrap="none" lIns="0" tIns="0" rIns="0" bIns="0" rtlCol="0" anchor="ctr"/>
           <a:lstStyle/>
           <a:p>
             <a:pPr algn="ctr" indent="0" marL="0">
               <a:buNone/>
             </a:pPr>
             <a:r>
-              <a:rPr lang="ja-JP" altLang="en-US" sz="1100" dirty="0">
+              <a:rPr lang="ja-JP" altLang="en-US" sz="1050" dirty="0">
                 <a:solidFill>
                   <a:srgbClr val="404040"/>
                 </a:solidFill>
@@ -11665,14 +11707,14 @@
               </a:rPr>
               <a:t>4つの</a:t>
             </a:r>
-            <a:endParaRPr lang="ja-JP" sz="1100" dirty="0"/>
+            <a:endParaRPr lang="ja-JP" sz="1050" dirty="0"/>
           </a:p>
           <a:p>
             <a:pPr algn="ctr" indent="0" marL="0">
               <a:buNone/>
             </a:pPr>
             <a:r>
-              <a:rPr lang="ja-JP" altLang="en-US" sz="1100" dirty="0">
+              <a:rPr lang="ja-JP" altLang="en-US" sz="1050" dirty="0">
                 <a:solidFill>
                   <a:srgbClr val="404040"/>
                 </a:solidFill>
@@ -11682,7 +11724,7 @@
               </a:rPr>
               <a:t>要素</a:t>
             </a:r>
-            <a:endParaRPr lang="ja-JP" sz="1100" dirty="0"/>
+            <a:endParaRPr lang="ja-JP" sz="1050" dirty="0"/>
           </a:p>
         </p:txBody>
       </p:sp>
@@ -11699,7 +11741,7 @@
           </a:xfrm>
           <a:prstGeom prst="roundRect">
             <a:avLst>
-              <a:gd name="adj" fmla="val 15625"/>
+              <a:gd name="adj" fmla="val 7813"/>
             </a:avLst>
           </a:prstGeom>
           <a:solidFill>
@@ -11708,14 +11750,14 @@
           <a:ln/>
         </p:spPr>
         <p:txBody>
-          <a:bodyPr wrap="square" lIns="0" tIns="0" rIns="0" bIns="0" rtlCol="0" anchor="ctr"/>
+          <a:bodyPr wrap="none" lIns="0" tIns="0" rIns="0" bIns="0" rtlCol="0" anchor="ctr"/>
           <a:lstStyle/>
           <a:p>
             <a:pPr algn="ctr" indent="0" marL="0">
               <a:buNone/>
             </a:pPr>
             <a:r>
-              <a:rPr lang="ja-JP" altLang="en-US" sz="1100" dirty="0">
+              <a:rPr lang="ja-JP" altLang="en-US" sz="1050" dirty="0">
                 <a:solidFill>
                   <a:srgbClr val="404040"/>
                 </a:solidFill>
@@ -11725,14 +11767,14 @@
               </a:rPr>
               <a:t>フェニレ</a:t>
             </a:r>
-            <a:endParaRPr lang="ja-JP" sz="1100" dirty="0"/>
+            <a:endParaRPr lang="ja-JP" sz="1050" dirty="0"/>
           </a:p>
           <a:p>
             <a:pPr algn="ctr" indent="0" marL="0">
               <a:buNone/>
             </a:pPr>
             <a:r>
-              <a:rPr lang="ja-JP" altLang="en-US" sz="1100" dirty="0">
+              <a:rPr lang="ja-JP" altLang="en-US" sz="1050" dirty="0">
                 <a:solidFill>
                   <a:srgbClr val="404040"/>
                 </a:solidFill>
@@ -11742,7 +11784,7 @@
               </a:rPr>
               <a:t>フリン</a:t>
             </a:r>
-            <a:endParaRPr lang="ja-JP" sz="1100" dirty="0"/>
+            <a:endParaRPr lang="ja-JP" sz="1050" dirty="0"/>
           </a:p>
         </p:txBody>
       </p:sp>
@@ -11759,7 +11801,7 @@
           </a:xfrm>
           <a:prstGeom prst="roundRect">
             <a:avLst>
-              <a:gd name="adj" fmla="val 15625"/>
+              <a:gd name="adj" fmla="val 7813"/>
             </a:avLst>
           </a:prstGeom>
           <a:solidFill>
@@ -11768,14 +11810,14 @@
           <a:ln/>
         </p:spPr>
         <p:txBody>
-          <a:bodyPr wrap="square" lIns="0" tIns="0" rIns="0" bIns="0" rtlCol="0" anchor="ctr"/>
+          <a:bodyPr wrap="none" lIns="0" tIns="0" rIns="0" bIns="0" rtlCol="0" anchor="ctr"/>
           <a:lstStyle/>
           <a:p>
             <a:pPr algn="ctr" indent="0" marL="0">
               <a:buNone/>
             </a:pPr>
             <a:r>
-              <a:rPr lang="ja-JP" altLang="en-US" sz="1100" dirty="0">
+              <a:rPr lang="ja-JP" altLang="en-US" sz="1050" dirty="0">
                 <a:solidFill>
                   <a:srgbClr val="404040"/>
                 </a:solidFill>
@@ -11785,14 +11827,14 @@
               </a:rPr>
               <a:t>エフェ</a:t>
             </a:r>
-            <a:endParaRPr lang="ja-JP" sz="1100" dirty="0"/>
+            <a:endParaRPr lang="ja-JP" sz="1050" dirty="0"/>
           </a:p>
           <a:p>
             <a:pPr algn="ctr" indent="0" marL="0">
               <a:buNone/>
             </a:pPr>
             <a:r>
-              <a:rPr lang="ja-JP" altLang="en-US" sz="1100" dirty="0">
+              <a:rPr lang="ja-JP" altLang="en-US" sz="1050" dirty="0">
                 <a:solidFill>
                   <a:srgbClr val="404040"/>
                 </a:solidFill>
@@ -11802,7 +11844,7 @@
               </a:rPr>
               <a:t>ドリン</a:t>
             </a:r>
-            <a:endParaRPr lang="ja-JP" sz="1100" dirty="0"/>
+            <a:endParaRPr lang="ja-JP" sz="1050" dirty="0"/>
           </a:p>
         </p:txBody>
       </p:sp>
@@ -11819,7 +11861,7 @@
           </a:xfrm>
           <a:prstGeom prst="roundRect">
             <a:avLst>
-              <a:gd name="adj" fmla="val 15625"/>
+              <a:gd name="adj" fmla="val 7813"/>
             </a:avLst>
           </a:prstGeom>
           <a:solidFill>
@@ -11828,14 +11870,14 @@
           <a:ln/>
         </p:spPr>
         <p:txBody>
-          <a:bodyPr wrap="square" lIns="0" tIns="0" rIns="0" bIns="0" rtlCol="0" anchor="ctr"/>
+          <a:bodyPr wrap="none" lIns="0" tIns="0" rIns="0" bIns="0" rtlCol="0" anchor="ctr"/>
           <a:lstStyle/>
           <a:p>
             <a:pPr algn="ctr" indent="0" marL="0">
               <a:buNone/>
             </a:pPr>
             <a:r>
-              <a:rPr lang="ja-JP" altLang="en-US" sz="1100" dirty="0">
+              <a:rPr lang="ja-JP" altLang="en-US" sz="1050" dirty="0">
                 <a:solidFill>
                   <a:srgbClr val="404040"/>
                 </a:solidFill>
@@ -11845,14 +11887,14 @@
               </a:rPr>
               <a:t>ノルアド</a:t>
             </a:r>
-            <a:endParaRPr lang="ja-JP" sz="1100" dirty="0"/>
+            <a:endParaRPr lang="ja-JP" sz="1050" dirty="0"/>
           </a:p>
           <a:p>
             <a:pPr algn="ctr" indent="0" marL="0">
               <a:buNone/>
             </a:pPr>
             <a:r>
-              <a:rPr lang="ja-JP" altLang="en-US" sz="1100" dirty="0">
+              <a:rPr lang="ja-JP" altLang="en-US" sz="1050" dirty="0">
                 <a:solidFill>
                   <a:srgbClr val="404040"/>
                 </a:solidFill>
@@ -11862,7 +11904,7 @@
               </a:rPr>
               <a:t>レナリン</a:t>
             </a:r>
-            <a:endParaRPr lang="ja-JP" sz="1100" dirty="0"/>
+            <a:endParaRPr lang="ja-JP" sz="1050" dirty="0"/>
           </a:p>
         </p:txBody>
       </p:sp>
@@ -11879,7 +11921,7 @@
           </a:xfrm>
           <a:prstGeom prst="roundRect">
             <a:avLst>
-              <a:gd name="adj" fmla="val 15625"/>
+              <a:gd name="adj" fmla="val 7813"/>
             </a:avLst>
           </a:prstGeom>
           <a:solidFill>
@@ -11888,14 +11930,14 @@
           <a:ln/>
         </p:spPr>
         <p:txBody>
-          <a:bodyPr wrap="square" lIns="0" tIns="0" rIns="0" bIns="0" rtlCol="0" anchor="ctr"/>
+          <a:bodyPr wrap="none" lIns="0" tIns="0" rIns="0" bIns="0" rtlCol="0" anchor="ctr"/>
           <a:lstStyle/>
           <a:p>
             <a:pPr algn="ctr" indent="0" marL="0">
               <a:buNone/>
             </a:pPr>
             <a:r>
-              <a:rPr lang="ja-JP" altLang="en-US" sz="1100" b="1" dirty="0">
+              <a:rPr lang="ja-JP" altLang="en-US" sz="1050" b="1" dirty="0">
                 <a:solidFill>
                   <a:srgbClr val="FFFFFF"/>
                 </a:solidFill>
@@ -11905,7 +11947,7 @@
               </a:rPr>
               <a:t>使い分け</a:t>
             </a:r>
-            <a:endParaRPr lang="ja-JP" sz="1100" dirty="0"/>
+            <a:endParaRPr lang="ja-JP" sz="1050" dirty="0"/>
           </a:p>
         </p:txBody>
       </p:sp>
@@ -12012,8 +12054,8 @@
         </p:nvSpPr>
         <p:spPr>
           <a:xfrm>
-            <a:off x="502920" y="1828800"/>
-            <a:ext cx="11155680" cy="4087368"/>
+            <a:off x="502920" y="1691640"/>
+            <a:ext cx="11155680" cy="4178808"/>
           </a:xfrm>
           <a:prstGeom prst="rect">
             <a:avLst/>
@@ -12022,7 +12064,7 @@
           <a:ln/>
         </p:spPr>
         <p:txBody>
-          <a:bodyPr wrap="square" lIns="0" tIns="0" rIns="0" bIns="0" rtlCol="0" anchor="t"/>
+          <a:bodyPr wrap="square" lIns="0" tIns="0" rIns="0" bIns="0" rtlCol="0" anchor="ctr"/>
           <a:lstStyle/>
           <a:p>
             <a:pPr algn="l" marL="355600" indent="-355600">
@@ -12131,7 +12173,7 @@
             <a:r>
               <a:rPr lang="ja-JP" altLang="en-US" sz="2400" b="1" dirty="0">
                 <a:solidFill>
-                  <a:srgbClr val="00A8AA"/>
+                  <a:srgbClr val="0072B2"/>
                 </a:solidFill>
                 <a:latin typeface="メイリオ" pitchFamily="34" charset="0"/>
                 <a:ea typeface="メイリオ" pitchFamily="34" charset="-122"/>
@@ -12174,7 +12216,7 @@
             <a:r>
               <a:rPr lang="ja-JP" altLang="en-US" sz="2400" b="1" dirty="0">
                 <a:solidFill>
-                  <a:srgbClr val="00A8AA"/>
+                  <a:srgbClr val="0072B2"/>
                 </a:solidFill>
                 <a:latin typeface="メイリオ" pitchFamily="34" charset="0"/>
                 <a:ea typeface="メイリオ" pitchFamily="34" charset="-122"/>
@@ -12306,7 +12348,7 @@
           </a:xfrm>
           <a:prstGeom prst="roundRect">
             <a:avLst>
-              <a:gd name="adj" fmla="val 15625"/>
+              <a:gd name="adj" fmla="val 7813"/>
             </a:avLst>
           </a:prstGeom>
           <a:solidFill>
@@ -12315,14 +12357,14 @@
           <a:ln/>
         </p:spPr>
         <p:txBody>
-          <a:bodyPr wrap="square" lIns="0" tIns="0" rIns="0" bIns="0" rtlCol="0" anchor="ctr"/>
+          <a:bodyPr wrap="none" lIns="0" tIns="0" rIns="0" bIns="0" rtlCol="0" anchor="ctr"/>
           <a:lstStyle/>
           <a:p>
             <a:pPr algn="ctr" indent="0" marL="0">
               <a:buNone/>
             </a:pPr>
             <a:r>
-              <a:rPr lang="ja-JP" altLang="en-US" sz="1100" dirty="0">
+              <a:rPr lang="ja-JP" altLang="en-US" sz="1050" dirty="0">
                 <a:solidFill>
                   <a:srgbClr val="404040"/>
                 </a:solidFill>
@@ -12332,14 +12374,14 @@
               </a:rPr>
               <a:t>4つの</a:t>
             </a:r>
-            <a:endParaRPr lang="ja-JP" sz="1100" dirty="0"/>
+            <a:endParaRPr lang="ja-JP" sz="1050" dirty="0"/>
           </a:p>
           <a:p>
             <a:pPr algn="ctr" indent="0" marL="0">
               <a:buNone/>
             </a:pPr>
             <a:r>
-              <a:rPr lang="ja-JP" altLang="en-US" sz="1100" dirty="0">
+              <a:rPr lang="ja-JP" altLang="en-US" sz="1050" dirty="0">
                 <a:solidFill>
                   <a:srgbClr val="404040"/>
                 </a:solidFill>
@@ -12349,7 +12391,7 @@
               </a:rPr>
               <a:t>要素</a:t>
             </a:r>
-            <a:endParaRPr lang="ja-JP" sz="1100" dirty="0"/>
+            <a:endParaRPr lang="ja-JP" sz="1050" dirty="0"/>
           </a:p>
         </p:txBody>
       </p:sp>
@@ -12366,7 +12408,7 @@
           </a:xfrm>
           <a:prstGeom prst="roundRect">
             <a:avLst>
-              <a:gd name="adj" fmla="val 15625"/>
+              <a:gd name="adj" fmla="val 7813"/>
             </a:avLst>
           </a:prstGeom>
           <a:solidFill>
@@ -12375,14 +12417,14 @@
           <a:ln/>
         </p:spPr>
         <p:txBody>
-          <a:bodyPr wrap="square" lIns="0" tIns="0" rIns="0" bIns="0" rtlCol="0" anchor="ctr"/>
+          <a:bodyPr wrap="none" lIns="0" tIns="0" rIns="0" bIns="0" rtlCol="0" anchor="ctr"/>
           <a:lstStyle/>
           <a:p>
             <a:pPr algn="ctr" indent="0" marL="0">
               <a:buNone/>
             </a:pPr>
             <a:r>
-              <a:rPr lang="ja-JP" altLang="en-US" sz="1100" dirty="0">
+              <a:rPr lang="ja-JP" altLang="en-US" sz="1050" dirty="0">
                 <a:solidFill>
                   <a:srgbClr val="404040"/>
                 </a:solidFill>
@@ -12392,14 +12434,14 @@
               </a:rPr>
               <a:t>フェニレ</a:t>
             </a:r>
-            <a:endParaRPr lang="ja-JP" sz="1100" dirty="0"/>
+            <a:endParaRPr lang="ja-JP" sz="1050" dirty="0"/>
           </a:p>
           <a:p>
             <a:pPr algn="ctr" indent="0" marL="0">
               <a:buNone/>
             </a:pPr>
             <a:r>
-              <a:rPr lang="ja-JP" altLang="en-US" sz="1100" dirty="0">
+              <a:rPr lang="ja-JP" altLang="en-US" sz="1050" dirty="0">
                 <a:solidFill>
                   <a:srgbClr val="404040"/>
                 </a:solidFill>
@@ -12409,7 +12451,7 @@
               </a:rPr>
               <a:t>フリン</a:t>
             </a:r>
-            <a:endParaRPr lang="ja-JP" sz="1100" dirty="0"/>
+            <a:endParaRPr lang="ja-JP" sz="1050" dirty="0"/>
           </a:p>
         </p:txBody>
       </p:sp>
@@ -12426,7 +12468,7 @@
           </a:xfrm>
           <a:prstGeom prst="roundRect">
             <a:avLst>
-              <a:gd name="adj" fmla="val 15625"/>
+              <a:gd name="adj" fmla="val 7813"/>
             </a:avLst>
           </a:prstGeom>
           <a:solidFill>
@@ -12435,14 +12477,14 @@
           <a:ln/>
         </p:spPr>
         <p:txBody>
-          <a:bodyPr wrap="square" lIns="0" tIns="0" rIns="0" bIns="0" rtlCol="0" anchor="ctr"/>
+          <a:bodyPr wrap="none" lIns="0" tIns="0" rIns="0" bIns="0" rtlCol="0" anchor="ctr"/>
           <a:lstStyle/>
           <a:p>
             <a:pPr algn="ctr" indent="0" marL="0">
               <a:buNone/>
             </a:pPr>
             <a:r>
-              <a:rPr lang="ja-JP" altLang="en-US" sz="1100" dirty="0">
+              <a:rPr lang="ja-JP" altLang="en-US" sz="1050" dirty="0">
                 <a:solidFill>
                   <a:srgbClr val="404040"/>
                 </a:solidFill>
@@ -12452,14 +12494,14 @@
               </a:rPr>
               <a:t>エフェ</a:t>
             </a:r>
-            <a:endParaRPr lang="ja-JP" sz="1100" dirty="0"/>
+            <a:endParaRPr lang="ja-JP" sz="1050" dirty="0"/>
           </a:p>
           <a:p>
             <a:pPr algn="ctr" indent="0" marL="0">
               <a:buNone/>
             </a:pPr>
             <a:r>
-              <a:rPr lang="ja-JP" altLang="en-US" sz="1100" dirty="0">
+              <a:rPr lang="ja-JP" altLang="en-US" sz="1050" dirty="0">
                 <a:solidFill>
                   <a:srgbClr val="404040"/>
                 </a:solidFill>
@@ -12469,7 +12511,7 @@
               </a:rPr>
               <a:t>ドリン</a:t>
             </a:r>
-            <a:endParaRPr lang="ja-JP" sz="1100" dirty="0"/>
+            <a:endParaRPr lang="ja-JP" sz="1050" dirty="0"/>
           </a:p>
         </p:txBody>
       </p:sp>
@@ -12486,7 +12528,7 @@
           </a:xfrm>
           <a:prstGeom prst="roundRect">
             <a:avLst>
-              <a:gd name="adj" fmla="val 15625"/>
+              <a:gd name="adj" fmla="val 7813"/>
             </a:avLst>
           </a:prstGeom>
           <a:solidFill>
@@ -12495,14 +12537,14 @@
           <a:ln/>
         </p:spPr>
         <p:txBody>
-          <a:bodyPr wrap="square" lIns="0" tIns="0" rIns="0" bIns="0" rtlCol="0" anchor="ctr"/>
+          <a:bodyPr wrap="none" lIns="0" tIns="0" rIns="0" bIns="0" rtlCol="0" anchor="ctr"/>
           <a:lstStyle/>
           <a:p>
             <a:pPr algn="ctr" indent="0" marL="0">
               <a:buNone/>
             </a:pPr>
             <a:r>
-              <a:rPr lang="ja-JP" altLang="en-US" sz="1100" dirty="0">
+              <a:rPr lang="ja-JP" altLang="en-US" sz="1050" dirty="0">
                 <a:solidFill>
                   <a:srgbClr val="404040"/>
                 </a:solidFill>
@@ -12512,14 +12554,14 @@
               </a:rPr>
               <a:t>ノルアド</a:t>
             </a:r>
-            <a:endParaRPr lang="ja-JP" sz="1100" dirty="0"/>
+            <a:endParaRPr lang="ja-JP" sz="1050" dirty="0"/>
           </a:p>
           <a:p>
             <a:pPr algn="ctr" indent="0" marL="0">
               <a:buNone/>
             </a:pPr>
             <a:r>
-              <a:rPr lang="ja-JP" altLang="en-US" sz="1100" dirty="0">
+              <a:rPr lang="ja-JP" altLang="en-US" sz="1050" dirty="0">
                 <a:solidFill>
                   <a:srgbClr val="404040"/>
                 </a:solidFill>
@@ -12529,7 +12571,7 @@
               </a:rPr>
               <a:t>レナリン</a:t>
             </a:r>
-            <a:endParaRPr lang="ja-JP" sz="1100" dirty="0"/>
+            <a:endParaRPr lang="ja-JP" sz="1050" dirty="0"/>
           </a:p>
         </p:txBody>
       </p:sp>
@@ -12546,7 +12588,7 @@
           </a:xfrm>
           <a:prstGeom prst="roundRect">
             <a:avLst>
-              <a:gd name="adj" fmla="val 15625"/>
+              <a:gd name="adj" fmla="val 7813"/>
             </a:avLst>
           </a:prstGeom>
           <a:solidFill>
@@ -12555,14 +12597,14 @@
           <a:ln/>
         </p:spPr>
         <p:txBody>
-          <a:bodyPr wrap="square" lIns="0" tIns="0" rIns="0" bIns="0" rtlCol="0" anchor="ctr"/>
+          <a:bodyPr wrap="none" lIns="0" tIns="0" rIns="0" bIns="0" rtlCol="0" anchor="ctr"/>
           <a:lstStyle/>
           <a:p>
             <a:pPr algn="ctr" indent="0" marL="0">
               <a:buNone/>
             </a:pPr>
             <a:r>
-              <a:rPr lang="ja-JP" altLang="en-US" sz="1100" b="1" dirty="0">
+              <a:rPr lang="ja-JP" altLang="en-US" sz="1050" b="1" dirty="0">
                 <a:solidFill>
                   <a:srgbClr val="FFFFFF"/>
                 </a:solidFill>
@@ -12572,7 +12614,7 @@
               </a:rPr>
               <a:t>使い分け</a:t>
             </a:r>
-            <a:endParaRPr lang="ja-JP" sz="1100" dirty="0"/>
+            <a:endParaRPr lang="ja-JP" sz="1050" dirty="0"/>
           </a:p>
         </p:txBody>
       </p:sp>
@@ -12662,8 +12704,8 @@
         </p:nvSpPr>
         <p:spPr>
           <a:xfrm>
-            <a:off x="502920" y="1828800"/>
-            <a:ext cx="11155680" cy="4069080"/>
+            <a:off x="502920" y="1691640"/>
+            <a:ext cx="11155680" cy="4480560"/>
           </a:xfrm>
           <a:prstGeom prst="rect">
             <a:avLst/>
@@ -12672,12 +12714,12 @@
           <a:ln/>
         </p:spPr>
         <p:txBody>
-          <a:bodyPr wrap="square" lIns="0" tIns="0" rIns="0" bIns="0" rtlCol="0" anchor="t"/>
+          <a:bodyPr wrap="square" lIns="0" tIns="0" rIns="0" bIns="0" rtlCol="0" anchor="ctr"/>
           <a:lstStyle/>
           <a:p>
             <a:pPr algn="l" marL="406400" indent="-406400">
               <a:spcAft>
-                <a:spcPts val="2600"/>
+                <a:spcPts val="3000"/>
               </a:spcAft>
               <a:buSzPct val="100000"/>
               <a:buChar char="•"/>
@@ -12709,7 +12751,7 @@
           <a:p>
             <a:pPr algn="l" marL="406400" indent="-406400">
               <a:spcAft>
-                <a:spcPts val="2600"/>
+                <a:spcPts val="3000"/>
               </a:spcAft>
               <a:buSzPct val="100000"/>
               <a:buChar char="•"/>
@@ -12741,7 +12783,7 @@
           <a:p>
             <a:pPr algn="l" marL="406400" indent="-406400">
               <a:spcAft>
-                <a:spcPts val="2600"/>
+                <a:spcPts val="3000"/>
               </a:spcAft>
               <a:buSzPct val="100000"/>
               <a:buChar char="•"/>
@@ -12773,7 +12815,7 @@
           <a:p>
             <a:pPr algn="l" marL="406400" indent="-406400">
               <a:spcAft>
-                <a:spcPts val="2600"/>
+                <a:spcPts val="3000"/>
               </a:spcAft>
               <a:buSzPct val="100000"/>
               <a:buChar char="•"/>
@@ -12816,7 +12858,7 @@
           <a:p>
             <a:pPr algn="l" marL="406400" indent="-406400">
               <a:spcAft>
-                <a:spcPts val="2600"/>
+                <a:spcPts val="3000"/>
               </a:spcAft>
               <a:buSzPct val="100000"/>
               <a:buChar char="•"/>
